--- a/content/youtube/shorts/SHORT_NEWS_01_anthropic_freedom.pptx
+++ b/content/youtube/shorts/SHORT_NEWS_01_anthropic_freedom.pptx
@@ -3088,7 +3088,7 @@
     <p:bg>
       <p:bgPr>
         <a:solidFill>
-          <a:srgbClr val="1C1917"/>
+          <a:srgbClr val="12100E"/>
         </a:solidFill>
         <a:effectLst/>
       </p:bgPr>
@@ -3102,20 +3102,22 @@
       <p:grpSpPr/>
       <p:sp>
         <p:nvSpPr>
-          <p:cNvPr id="2" name="Rectangle 1"/>
+          <p:cNvPr id="2" name="Rounded Rectangle 1"/>
           <p:cNvSpPr/>
           <p:nvPr/>
         </p:nvSpPr>
         <p:spPr>
           <a:xfrm>
-            <a:off x="0" y="0"/>
-            <a:ext cx="4114800" cy="54864"/>
-          </a:xfrm>
-          <a:prstGeom prst="rect">
-            <a:avLst/>
+            <a:off x="320040" y="457200"/>
+            <a:ext cx="1645920" cy="274320"/>
+          </a:xfrm>
+          <a:prstGeom prst="roundRect">
+            <a:avLst>
+              <a:gd name="adj" fmla="val 35000"/>
+            </a:avLst>
           </a:prstGeom>
           <a:solidFill>
-            <a:srgbClr val="B8942F"/>
+            <a:srgbClr val="E84D3D"/>
           </a:solidFill>
           <a:ln>
             <a:noFill/>
@@ -3136,10 +3138,19 @@
           </a:fontRef>
         </p:style>
         <p:txBody>
-          <a:bodyPr rtlCol="0" anchor="ctr"/>
+          <a:bodyPr rtlCol="0" anchor="ctr" wrap="none"/>
           <a:lstStyle/>
           <a:p>
             <a:pPr algn="ctr"/>
+            <a:r>
+              <a:rPr sz="1100" b="1">
+                <a:solidFill>
+                  <a:srgbClr val="F5F0EB"/>
+                </a:solidFill>
+                <a:latin typeface="Hiragino Sans"/>
+              </a:rPr>
+              <a:t>3月18日 Anthropic発表</a:t>
+            </a:r>
           </a:p>
         </p:txBody>
       </p:sp>
@@ -3151,8 +3162,8 @@
         </p:nvSpPr>
         <p:spPr>
           <a:xfrm>
-            <a:off x="274320" y="6675120"/>
-            <a:ext cx="3566160" cy="365760"/>
+            <a:off x="320040" y="1143000"/>
+            <a:ext cx="3474720" cy="49926"/>
           </a:xfrm>
           <a:prstGeom prst="rect">
             <a:avLst/>
@@ -3180,83 +3191,33 @@
           <a:bodyPr rtlCol="0" anchor="ctr" wrap="square"/>
           <a:lstStyle/>
           <a:p>
-            <a:pPr algn="l"/>
-            <a:r>
-              <a:rPr sz="900">
-                <a:solidFill>
-                  <a:srgbClr val="B8942F"/>
+            <a:pPr algn="l">
+              <a:lnSpc>
+                <a:spcPct val="130000"/>
+              </a:lnSpc>
+            </a:pPr>
+            <a:r>
+              <a:rPr sz="3000" b="1">
+                <a:solidFill>
+                  <a:srgbClr val="F5F0EB"/>
                 </a:solidFill>
                 <a:latin typeface="Hiragino Sans"/>
               </a:rPr>
-              <a:t>HARMONIC insight</a:t>
-            </a:r>
-          </a:p>
-        </p:txBody>
-      </p:sp>
-      <p:sp>
-        <p:nvSpPr>
-          <p:cNvPr id="4" name="Rounded Rectangle 3"/>
+              <a:t>8万人に聞いた。</a:t>
+            </a:r>
+          </a:p>
+        </p:txBody>
+      </p:sp>
+      <p:sp>
+        <p:nvSpPr>
+          <p:cNvPr id="4" name="Rectangle 3"/>
           <p:cNvSpPr/>
           <p:nvPr/>
         </p:nvSpPr>
         <p:spPr>
           <a:xfrm>
-            <a:off x="137160" y="274320"/>
-            <a:ext cx="1920240" cy="365760"/>
-          </a:xfrm>
-          <a:prstGeom prst="roundRect">
-            <a:avLst>
-              <a:gd name="adj" fmla="val 25000"/>
-            </a:avLst>
-          </a:prstGeom>
-          <a:solidFill>
-            <a:srgbClr val="E53935"/>
-          </a:solidFill>
-          <a:ln>
-            <a:noFill/>
-          </a:ln>
-        </p:spPr>
-        <p:style>
-          <a:lnRef idx="1">
-            <a:schemeClr val="accent1"/>
-          </a:lnRef>
-          <a:fillRef idx="3">
-            <a:schemeClr val="accent1"/>
-          </a:fillRef>
-          <a:effectRef idx="2">
-            <a:schemeClr val="accent1"/>
-          </a:effectRef>
-          <a:fontRef idx="minor">
-            <a:schemeClr val="lt1"/>
-          </a:fontRef>
-        </p:style>
-        <p:txBody>
-          <a:bodyPr rtlCol="0" anchor="ctr" wrap="none"/>
-          <a:lstStyle/>
-          <a:p>
-            <a:pPr algn="ctr"/>
-            <a:r>
-              <a:rPr sz="1200" b="1">
-                <a:solidFill>
-                  <a:srgbClr val="FFFFFF"/>
-                </a:solidFill>
-                <a:latin typeface="Hiragino Sans"/>
-              </a:rPr>
-              <a:t>3月18日 発表</a:t>
-            </a:r>
-          </a:p>
-        </p:txBody>
-      </p:sp>
-      <p:sp>
-        <p:nvSpPr>
-          <p:cNvPr id="5" name="Rectangle 4"/>
-          <p:cNvSpPr/>
-          <p:nvPr/>
-        </p:nvSpPr>
-        <p:spPr>
-          <a:xfrm>
-            <a:off x="2148840" y="274320"/>
-            <a:ext cx="1554480" cy="365760"/>
+            <a:off x="320040" y="1828800"/>
+            <a:ext cx="3474720" cy="149778"/>
           </a:xfrm>
           <a:prstGeom prst="rect">
             <a:avLst/>
@@ -3281,19 +3242,98 @@
           </a:fontRef>
         </p:style>
         <p:txBody>
-          <a:bodyPr rtlCol="0" anchor="ctr" wrap="none"/>
-          <a:lstStyle/>
-          <a:p>
-            <a:pPr algn="l"/>
-            <a:r>
-              <a:rPr sz="1100">
-                <a:solidFill>
-                  <a:srgbClr val="A8A29E"/>
+          <a:bodyPr rtlCol="0" anchor="ctr" wrap="square"/>
+          <a:lstStyle/>
+          <a:p>
+            <a:pPr algn="l">
+              <a:lnSpc>
+                <a:spcPct val="130000"/>
+              </a:lnSpc>
+            </a:pPr>
+            <a:r>
+              <a:rPr sz="3000" b="1">
+                <a:solidFill>
+                  <a:srgbClr val="C9A02D"/>
                 </a:solidFill>
                 <a:latin typeface="Hiragino Sans"/>
               </a:rPr>
-              <a:t>Anthropic</a:t>
-            </a:r>
+              <a:t>AIに求めるもの、</a:t>
+            </a:r>
+          </a:p>
+          <a:p>
+            <a:pPr algn="l">
+              <a:lnSpc>
+                <a:spcPct val="130000"/>
+              </a:lnSpc>
+            </a:pPr>
+            <a:r>
+              <a:rPr sz="3000" b="1">
+                <a:solidFill>
+                  <a:srgbClr val="C9A02D"/>
+                </a:solidFill>
+                <a:latin typeface="Hiragino Sans"/>
+              </a:rPr>
+              <a:t>生産性じゃ</a:t>
+            </a:r>
+          </a:p>
+          <a:p>
+            <a:pPr algn="l">
+              <a:lnSpc>
+                <a:spcPct val="130000"/>
+              </a:lnSpc>
+            </a:pPr>
+            <a:r>
+              <a:rPr sz="3000" b="1">
+                <a:solidFill>
+                  <a:srgbClr val="C9A02D"/>
+                </a:solidFill>
+                <a:latin typeface="Hiragino Sans"/>
+              </a:rPr>
+              <a:t>なかった。</a:t>
+            </a:r>
+          </a:p>
+        </p:txBody>
+      </p:sp>
+      <p:sp>
+        <p:nvSpPr>
+          <p:cNvPr id="5" name="Rectangle 4"/>
+          <p:cNvSpPr/>
+          <p:nvPr/>
+        </p:nvSpPr>
+        <p:spPr>
+          <a:xfrm>
+            <a:off x="320040" y="3886200"/>
+            <a:ext cx="914400" cy="13716"/>
+          </a:xfrm>
+          <a:prstGeom prst="rect">
+            <a:avLst/>
+          </a:prstGeom>
+          <a:solidFill>
+            <a:srgbClr val="C9A02D"/>
+          </a:solidFill>
+          <a:ln>
+            <a:noFill/>
+          </a:ln>
+        </p:spPr>
+        <p:style>
+          <a:lnRef idx="1">
+            <a:schemeClr val="accent1"/>
+          </a:lnRef>
+          <a:fillRef idx="3">
+            <a:schemeClr val="accent1"/>
+          </a:fillRef>
+          <a:effectRef idx="2">
+            <a:schemeClr val="accent1"/>
+          </a:effectRef>
+          <a:fontRef idx="minor">
+            <a:schemeClr val="lt1"/>
+          </a:fontRef>
+        </p:style>
+        <p:txBody>
+          <a:bodyPr rtlCol="0" anchor="ctr"/>
+          <a:lstStyle/>
+          <a:p>
+            <a:pPr algn="ctr"/>
           </a:p>
         </p:txBody>
       </p:sp>
@@ -3305,8 +3345,8 @@
         </p:nvSpPr>
         <p:spPr>
           <a:xfrm>
-            <a:off x="274320" y="1143000"/>
-            <a:ext cx="3566160" cy="640080"/>
+            <a:off x="320040" y="4114800"/>
+            <a:ext cx="3474720" cy="39940"/>
           </a:xfrm>
           <a:prstGeom prst="rect">
             <a:avLst/>
@@ -3331,27 +3371,38 @@
           </a:fontRef>
         </p:style>
         <p:txBody>
-          <a:bodyPr rtlCol="0" anchor="ctr" wrap="none"/>
-          <a:lstStyle/>
-          <a:p>
-            <a:pPr algn="ctr"/>
-            <a:r>
-              <a:rPr sz="5200" b="1">
-                <a:solidFill>
-                  <a:srgbClr val="B8942F"/>
+          <a:bodyPr rtlCol="0" anchor="ctr" wrap="square"/>
+          <a:lstStyle/>
+          <a:p>
+            <a:pPr algn="l">
+              <a:lnSpc>
+                <a:spcPct val="130000"/>
+              </a:lnSpc>
+            </a:pPr>
+            <a:r>
+              <a:rPr sz="1200" b="0">
+                <a:solidFill>
+                  <a:srgbClr val="78716C"/>
                 </a:solidFill>
                 <a:latin typeface="Hiragino Sans"/>
               </a:rPr>
-              <a:t>81,000</a:t>
-            </a:r>
-            <a:r>
-              <a:rPr sz="2000" b="1">
-                <a:solidFill>
-                  <a:srgbClr val="B8942F"/>
+              <a:t>世界159か国・70言語、</a:t>
+            </a:r>
+          </a:p>
+          <a:p>
+            <a:pPr algn="l">
+              <a:lnSpc>
+                <a:spcPct val="130000"/>
+              </a:lnSpc>
+            </a:pPr>
+            <a:r>
+              <a:rPr sz="1200" b="0">
+                <a:solidFill>
+                  <a:srgbClr val="78716C"/>
                 </a:solidFill>
                 <a:latin typeface="Hiragino Sans"/>
               </a:rPr>
-              <a:t>人</a:t>
+              <a:t>AI分野で史上最大の調査</a:t>
             </a:r>
           </a:p>
         </p:txBody>
@@ -3364,8 +3415,8 @@
         </p:nvSpPr>
         <p:spPr>
           <a:xfrm>
-            <a:off x="274320" y="1783080"/>
-            <a:ext cx="3566160" cy="320040"/>
+            <a:off x="320040" y="6720000"/>
+            <a:ext cx="3474720" cy="14977"/>
           </a:xfrm>
           <a:prstGeom prst="rect">
             <a:avLst/>
@@ -3390,142 +3441,22 @@
           </a:fontRef>
         </p:style>
         <p:txBody>
-          <a:bodyPr rtlCol="0" anchor="ctr"/>
-          <a:lstStyle/>
-          <a:p>
-            <a:pPr algn="ctr"/>
-            <a:r>
-              <a:rPr sz="1200">
-                <a:solidFill>
-                  <a:srgbClr val="A8A29E"/>
+          <a:bodyPr rtlCol="0" anchor="ctr" wrap="square"/>
+          <a:lstStyle/>
+          <a:p>
+            <a:pPr algn="l">
+              <a:lnSpc>
+                <a:spcPct val="130000"/>
+              </a:lnSpc>
+            </a:pPr>
+            <a:r>
+              <a:rPr sz="900" b="0">
+                <a:solidFill>
+                  <a:srgbClr val="C9A02D"/>
                 </a:solidFill>
                 <a:latin typeface="Hiragino Sans"/>
               </a:rPr>
-              <a:t>159か国 · 70言語</a:t>
-            </a:r>
-          </a:p>
-        </p:txBody>
-      </p:sp>
-      <p:sp>
-        <p:nvSpPr>
-          <p:cNvPr id="8" name="Rectangle 7"/>
-          <p:cNvSpPr/>
-          <p:nvPr/>
-        </p:nvSpPr>
-        <p:spPr>
-          <a:xfrm>
-            <a:off x="274320" y="2514600"/>
-            <a:ext cx="3566160" cy="1371600"/>
-          </a:xfrm>
-          <a:prstGeom prst="rect">
-            <a:avLst/>
-          </a:prstGeom>
-          <a:noFill/>
-          <a:ln>
-            <a:noFill/>
-          </a:ln>
-        </p:spPr>
-        <p:style>
-          <a:lnRef idx="1">
-            <a:schemeClr val="accent1"/>
-          </a:lnRef>
-          <a:fillRef idx="3">
-            <a:schemeClr val="accent1"/>
-          </a:fillRef>
-          <a:effectRef idx="2">
-            <a:schemeClr val="accent1"/>
-          </a:effectRef>
-          <a:fontRef idx="minor">
-            <a:schemeClr val="lt1"/>
-          </a:fontRef>
-        </p:style>
-        <p:txBody>
-          <a:bodyPr rtlCol="0" anchor="ctr" wrap="square"/>
-          <a:lstStyle/>
-          <a:p>
-            <a:pPr algn="l">
-              <a:spcAft>
-                <a:spcPts val="400"/>
-              </a:spcAft>
-            </a:pPr>
-            <a:r>
-              <a:rPr sz="2800" b="1">
-                <a:solidFill>
-                  <a:srgbClr val="FFFFFF"/>
-                </a:solidFill>
-                <a:latin typeface="Hiragino Sans"/>
-              </a:rPr>
-              <a:t>AIに何を求めるか？</a:t>
-            </a:r>
-          </a:p>
-          <a:p>
-            <a:pPr algn="l">
-              <a:spcAft>
-                <a:spcPts val="400"/>
-              </a:spcAft>
-            </a:pPr>
-            <a:r>
-              <a:rPr sz="2800" b="1">
-                <a:solidFill>
-                  <a:srgbClr val="FFFFFF"/>
-                </a:solidFill>
-                <a:latin typeface="Hiragino Sans"/>
-              </a:rPr>
-              <a:t>史上最大の調査</a:t>
-            </a:r>
-          </a:p>
-        </p:txBody>
-      </p:sp>
-      <p:sp>
-        <p:nvSpPr>
-          <p:cNvPr id="9" name="Rectangle 8"/>
-          <p:cNvSpPr/>
-          <p:nvPr/>
-        </p:nvSpPr>
-        <p:spPr>
-          <a:xfrm>
-            <a:off x="274320" y="4114800"/>
-            <a:ext cx="3566160" cy="640080"/>
-          </a:xfrm>
-          <a:prstGeom prst="rect">
-            <a:avLst/>
-          </a:prstGeom>
-          <a:noFill/>
-          <a:ln>
-            <a:noFill/>
-          </a:ln>
-        </p:spPr>
-        <p:style>
-          <a:lnRef idx="1">
-            <a:schemeClr val="accent1"/>
-          </a:lnRef>
-          <a:fillRef idx="3">
-            <a:schemeClr val="accent1"/>
-          </a:fillRef>
-          <a:effectRef idx="2">
-            <a:schemeClr val="accent1"/>
-          </a:effectRef>
-          <a:fontRef idx="minor">
-            <a:schemeClr val="lt1"/>
-          </a:fontRef>
-        </p:style>
-        <p:txBody>
-          <a:bodyPr rtlCol="0" anchor="ctr" wrap="square"/>
-          <a:lstStyle/>
-          <a:p>
-            <a:pPr algn="l">
-              <a:spcAft>
-                <a:spcPts val="400"/>
-              </a:spcAft>
-            </a:pPr>
-            <a:r>
-              <a:rPr sz="1500" b="0">
-                <a:solidFill>
-                  <a:srgbClr val="B8942F"/>
-                </a:solidFill>
-                <a:latin typeface="Hiragino Sans"/>
-              </a:rPr>
-              <a:t>答えは「生産性」じゃなかった</a:t>
+              <a:t>HARMONIC insight</a:t>
             </a:r>
           </a:p>
         </p:txBody>
@@ -3544,7 +3475,7 @@
     <p:bg>
       <p:bgPr>
         <a:solidFill>
-          <a:srgbClr val="1C1917"/>
+          <a:srgbClr val="12100E"/>
         </a:solidFill>
         <a:effectLst/>
       </p:bgPr>
@@ -3564,14 +3495,14 @@
         </p:nvSpPr>
         <p:spPr>
           <a:xfrm>
-            <a:off x="0" y="0"/>
-            <a:ext cx="4114800" cy="54864"/>
+            <a:off x="0" y="457200"/>
+            <a:ext cx="36576" cy="6400000"/>
           </a:xfrm>
           <a:prstGeom prst="rect">
             <a:avLst/>
           </a:prstGeom>
           <a:solidFill>
-            <a:srgbClr val="B8942F"/>
+            <a:srgbClr val="C9A02D"/>
           </a:solidFill>
           <a:ln>
             <a:noFill/>
@@ -3607,8 +3538,8 @@
         </p:nvSpPr>
         <p:spPr>
           <a:xfrm>
-            <a:off x="274320" y="6675120"/>
-            <a:ext cx="3566160" cy="365760"/>
+            <a:off x="320040" y="640080"/>
+            <a:ext cx="3474720" cy="109837"/>
           </a:xfrm>
           <a:prstGeom prst="rect">
             <a:avLst/>
@@ -3636,83 +3567,65 @@
           <a:bodyPr rtlCol="0" anchor="ctr" wrap="square"/>
           <a:lstStyle/>
           <a:p>
-            <a:pPr algn="l"/>
-            <a:r>
-              <a:rPr sz="900">
-                <a:solidFill>
-                  <a:srgbClr val="B8942F"/>
+            <a:pPr algn="l">
+              <a:lnSpc>
+                <a:spcPct val="130000"/>
+              </a:lnSpc>
+            </a:pPr>
+            <a:r>
+              <a:rPr sz="2200" b="0">
+                <a:solidFill>
+                  <a:srgbClr val="78716C"/>
                 </a:solidFill>
                 <a:latin typeface="Hiragino Sans"/>
               </a:rPr>
-              <a:t>HARMONIC insight</a:t>
-            </a:r>
-          </a:p>
-        </p:txBody>
-      </p:sp>
-      <p:sp>
-        <p:nvSpPr>
-          <p:cNvPr id="4" name="Rounded Rectangle 3"/>
+              <a:t>Anthropicの</a:t>
+            </a:r>
+          </a:p>
+          <a:p>
+            <a:pPr algn="l">
+              <a:lnSpc>
+                <a:spcPct val="130000"/>
+              </a:lnSpc>
+            </a:pPr>
+            <a:r>
+              <a:rPr sz="2200" b="0">
+                <a:solidFill>
+                  <a:srgbClr val="78716C"/>
+                </a:solidFill>
+                <a:latin typeface="Hiragino Sans"/>
+              </a:rPr>
+              <a:t>研究レポートが</a:t>
+            </a:r>
+          </a:p>
+          <a:p>
+            <a:pPr algn="l">
+              <a:lnSpc>
+                <a:spcPct val="130000"/>
+              </a:lnSpc>
+            </a:pPr>
+            <a:r>
+              <a:rPr sz="2200" b="0">
+                <a:solidFill>
+                  <a:srgbClr val="78716C"/>
+                </a:solidFill>
+                <a:latin typeface="Hiragino Sans"/>
+              </a:rPr>
+              <a:t>公開した数字</a:t>
+            </a:r>
+          </a:p>
+        </p:txBody>
+      </p:sp>
+      <p:sp>
+        <p:nvSpPr>
+          <p:cNvPr id="4" name="Rectangle 3"/>
           <p:cNvSpPr/>
           <p:nvPr/>
         </p:nvSpPr>
         <p:spPr>
           <a:xfrm>
-            <a:off x="137160" y="274320"/>
-            <a:ext cx="1920240" cy="365760"/>
-          </a:xfrm>
-          <a:prstGeom prst="roundRect">
-            <a:avLst>
-              <a:gd name="adj" fmla="val 25000"/>
-            </a:avLst>
-          </a:prstGeom>
-          <a:solidFill>
-            <a:srgbClr val="E53935"/>
-          </a:solidFill>
-          <a:ln>
-            <a:noFill/>
-          </a:ln>
-        </p:spPr>
-        <p:style>
-          <a:lnRef idx="1">
-            <a:schemeClr val="accent1"/>
-          </a:lnRef>
-          <a:fillRef idx="3">
-            <a:schemeClr val="accent1"/>
-          </a:fillRef>
-          <a:effectRef idx="2">
-            <a:schemeClr val="accent1"/>
-          </a:effectRef>
-          <a:fontRef idx="minor">
-            <a:schemeClr val="lt1"/>
-          </a:fontRef>
-        </p:style>
-        <p:txBody>
-          <a:bodyPr rtlCol="0" anchor="ctr" wrap="none"/>
-          <a:lstStyle/>
-          <a:p>
-            <a:pPr algn="ctr"/>
-            <a:r>
-              <a:rPr sz="1200" b="1">
-                <a:solidFill>
-                  <a:srgbClr val="FFFFFF"/>
-                </a:solidFill>
-                <a:latin typeface="Hiragino Sans"/>
-              </a:rPr>
-              <a:t>3月18日 発表</a:t>
-            </a:r>
-          </a:p>
-        </p:txBody>
-      </p:sp>
-      <p:sp>
-        <p:nvSpPr>
-          <p:cNvPr id="5" name="Rectangle 4"/>
-          <p:cNvSpPr/>
-          <p:nvPr/>
-        </p:nvSpPr>
-        <p:spPr>
-          <a:xfrm>
-            <a:off x="2148840" y="274320"/>
-            <a:ext cx="1554480" cy="365760"/>
+            <a:off x="320040" y="1600200"/>
+            <a:ext cx="3474720" cy="82296"/>
           </a:xfrm>
           <a:prstGeom prst="rect">
             <a:avLst/>
@@ -3742,27 +3655,36 @@
           <a:p>
             <a:pPr algn="l"/>
             <a:r>
-              <a:rPr sz="1100">
-                <a:solidFill>
-                  <a:srgbClr val="A8A29E"/>
+              <a:rPr sz="6000" b="1">
+                <a:solidFill>
+                  <a:srgbClr val="C9A02D"/>
                 </a:solidFill>
                 <a:latin typeface="Hiragino Sans"/>
               </a:rPr>
-              <a:t>Anthropic</a:t>
-            </a:r>
-          </a:p>
-        </p:txBody>
-      </p:sp>
-      <p:sp>
-        <p:nvSpPr>
-          <p:cNvPr id="6" name="Rectangle 5"/>
+              <a:t>81,000</a:t>
+            </a:r>
+            <a:r>
+              <a:rPr sz="2400" b="1">
+                <a:solidFill>
+                  <a:srgbClr val="C9A02D"/>
+                </a:solidFill>
+                <a:latin typeface="Hiragino Sans"/>
+              </a:rPr>
+              <a:t> 人</a:t>
+            </a:r>
+          </a:p>
+        </p:txBody>
+      </p:sp>
+      <p:sp>
+        <p:nvSpPr>
+          <p:cNvPr id="5" name="Rectangle 4"/>
           <p:cNvSpPr/>
           <p:nvPr/>
         </p:nvSpPr>
         <p:spPr>
           <a:xfrm>
-            <a:off x="274320" y="822960"/>
-            <a:ext cx="3566160" cy="731520"/>
+            <a:off x="320040" y="2743200"/>
+            <a:ext cx="3474720" cy="66568"/>
           </a:xfrm>
           <a:prstGeom prst="rect">
             <a:avLst/>
@@ -3791,35 +3713,78 @@
           <a:lstStyle/>
           <a:p>
             <a:pPr algn="l">
-              <a:spcAft>
-                <a:spcPts val="400"/>
-              </a:spcAft>
+              <a:lnSpc>
+                <a:spcPct val="130000"/>
+              </a:lnSpc>
             </a:pPr>
             <a:r>
-              <a:rPr sz="2400" b="1">
-                <a:solidFill>
-                  <a:srgbClr val="FFFFFF"/>
+              <a:rPr sz="2000" b="1">
+                <a:solidFill>
+                  <a:srgbClr val="F5F0EB"/>
                 </a:solidFill>
                 <a:latin typeface="Hiragino Sans"/>
               </a:rPr>
-              <a:t>AIに求めるもの</a:t>
+              <a:t>「魔法の杖があったら</a:t>
             </a:r>
           </a:p>
           <a:p>
             <a:pPr algn="l">
-              <a:spcAft>
-                <a:spcPts val="400"/>
-              </a:spcAft>
+              <a:lnSpc>
+                <a:spcPct val="130000"/>
+              </a:lnSpc>
             </a:pPr>
             <a:r>
-              <a:rPr sz="2400" b="1">
-                <a:solidFill>
-                  <a:srgbClr val="FFFFFF"/>
+              <a:rPr sz="2000" b="1">
+                <a:solidFill>
+                  <a:srgbClr val="F5F0EB"/>
                 </a:solidFill>
                 <a:latin typeface="Hiragino Sans"/>
               </a:rPr>
-              <a:t>トップ4</a:t>
-            </a:r>
+              <a:t>  AIに何をさせたい？」</a:t>
+            </a:r>
+          </a:p>
+        </p:txBody>
+      </p:sp>
+      <p:sp>
+        <p:nvSpPr>
+          <p:cNvPr id="6" name="Rectangle 5"/>
+          <p:cNvSpPr/>
+          <p:nvPr/>
+        </p:nvSpPr>
+        <p:spPr>
+          <a:xfrm>
+            <a:off x="320040" y="3657600"/>
+            <a:ext cx="914400" cy="13716"/>
+          </a:xfrm>
+          <a:prstGeom prst="rect">
+            <a:avLst/>
+          </a:prstGeom>
+          <a:solidFill>
+            <a:srgbClr val="C9A02D"/>
+          </a:solidFill>
+          <a:ln>
+            <a:noFill/>
+          </a:ln>
+        </p:spPr>
+        <p:style>
+          <a:lnRef idx="1">
+            <a:schemeClr val="accent1"/>
+          </a:lnRef>
+          <a:fillRef idx="3">
+            <a:schemeClr val="accent1"/>
+          </a:fillRef>
+          <a:effectRef idx="2">
+            <a:schemeClr val="accent1"/>
+          </a:effectRef>
+          <a:fontRef idx="minor">
+            <a:schemeClr val="lt1"/>
+          </a:fontRef>
+        </p:style>
+        <p:txBody>
+          <a:bodyPr rtlCol="0" anchor="ctr"/>
+          <a:lstStyle/>
+          <a:p>
+            <a:pPr algn="ctr"/>
           </a:p>
         </p:txBody>
       </p:sp>
@@ -3831,8 +3796,8 @@
         </p:nvSpPr>
         <p:spPr>
           <a:xfrm>
-            <a:off x="274320" y="1828800"/>
-            <a:ext cx="3566160" cy="228600"/>
+            <a:off x="320040" y="3886200"/>
+            <a:ext cx="3474720" cy="21634"/>
           </a:xfrm>
           <a:prstGeom prst="rect">
             <a:avLst/>
@@ -3857,122 +3822,36 @@
           </a:fontRef>
         </p:style>
         <p:txBody>
-          <a:bodyPr rtlCol="0" anchor="ctr"/>
-          <a:lstStyle/>
-          <a:p>
-            <a:pPr algn="l"/>
-            <a:r>
-              <a:rPr sz="1100">
-                <a:solidFill>
-                  <a:srgbClr val="A8A29E"/>
+          <a:bodyPr rtlCol="0" anchor="ctr" wrap="square"/>
+          <a:lstStyle/>
+          <a:p>
+            <a:pPr algn="l">
+              <a:lnSpc>
+                <a:spcPct val="130000"/>
+              </a:lnSpc>
+            </a:pPr>
+            <a:r>
+              <a:rPr sz="1300" b="0">
+                <a:solidFill>
+                  <a:srgbClr val="78716C"/>
                 </a:solidFill>
                 <a:latin typeface="Hiragino Sans"/>
               </a:rPr>
-              <a:t>職業的卓越性</a:t>
-            </a:r>
-          </a:p>
-        </p:txBody>
-      </p:sp>
-      <p:sp>
-        <p:nvSpPr>
-          <p:cNvPr id="8" name="Rounded Rectangle 7"/>
+              <a:t>回答は9つのビジョンに分類された</a:t>
+            </a:r>
+          </a:p>
+        </p:txBody>
+      </p:sp>
+      <p:sp>
+        <p:nvSpPr>
+          <p:cNvPr id="8" name="Rectangle 7"/>
           <p:cNvSpPr/>
           <p:nvPr/>
         </p:nvSpPr>
         <p:spPr>
           <a:xfrm>
-            <a:off x="274320" y="2057400"/>
-            <a:ext cx="3031236" cy="320040"/>
-          </a:xfrm>
-          <a:prstGeom prst="roundRect">
-            <a:avLst>
-              <a:gd name="adj" fmla="val 15000"/>
-            </a:avLst>
-          </a:prstGeom>
-          <a:solidFill>
-            <a:srgbClr val="2C2723"/>
-          </a:solidFill>
-          <a:ln>
-            <a:noFill/>
-          </a:ln>
-        </p:spPr>
-        <p:style>
-          <a:lnRef idx="1">
-            <a:schemeClr val="accent1"/>
-          </a:lnRef>
-          <a:fillRef idx="3">
-            <a:schemeClr val="accent1"/>
-          </a:fillRef>
-          <a:effectRef idx="2">
-            <a:schemeClr val="accent1"/>
-          </a:effectRef>
-          <a:fontRef idx="minor">
-            <a:schemeClr val="lt1"/>
-          </a:fontRef>
-        </p:style>
-        <p:txBody>
-          <a:bodyPr rtlCol="0" anchor="ctr"/>
-          <a:lstStyle/>
-          <a:p>
-            <a:pPr algn="ctr"/>
-          </a:p>
-        </p:txBody>
-      </p:sp>
-      <p:sp>
-        <p:nvSpPr>
-          <p:cNvPr id="9" name="Rounded Rectangle 8"/>
-          <p:cNvSpPr/>
-          <p:nvPr/>
-        </p:nvSpPr>
-        <p:spPr>
-          <a:xfrm>
-            <a:off x="274320" y="2057400"/>
-            <a:ext cx="2279489" cy="320040"/>
-          </a:xfrm>
-          <a:prstGeom prst="roundRect">
-            <a:avLst>
-              <a:gd name="adj" fmla="val 15000"/>
-            </a:avLst>
-          </a:prstGeom>
-          <a:solidFill>
-            <a:srgbClr val="42A5F5"/>
-          </a:solidFill>
-          <a:ln>
-            <a:noFill/>
-          </a:ln>
-        </p:spPr>
-        <p:style>
-          <a:lnRef idx="1">
-            <a:schemeClr val="accent1"/>
-          </a:lnRef>
-          <a:fillRef idx="3">
-            <a:schemeClr val="accent1"/>
-          </a:fillRef>
-          <a:effectRef idx="2">
-            <a:schemeClr val="accent1"/>
-          </a:effectRef>
-          <a:fontRef idx="minor">
-            <a:schemeClr val="lt1"/>
-          </a:fontRef>
-        </p:style>
-        <p:txBody>
-          <a:bodyPr rtlCol="0" anchor="ctr"/>
-          <a:lstStyle/>
-          <a:p>
-            <a:pPr algn="ctr"/>
-          </a:p>
-        </p:txBody>
-      </p:sp>
-      <p:sp>
-        <p:nvSpPr>
-          <p:cNvPr id="10" name="Rectangle 9"/>
-          <p:cNvSpPr/>
-          <p:nvPr/>
-        </p:nvSpPr>
-        <p:spPr>
-          <a:xfrm>
-            <a:off x="3374136" y="2057400"/>
-            <a:ext cx="548640" cy="320040"/>
+            <a:off x="320040" y="6400000"/>
+            <a:ext cx="3474720" cy="13313"/>
           </a:xfrm>
           <a:prstGeom prst="rect">
             <a:avLst/>
@@ -3997,32 +3876,36 @@
           </a:fontRef>
         </p:style>
         <p:txBody>
-          <a:bodyPr rtlCol="0" anchor="ctr"/>
-          <a:lstStyle/>
-          <a:p>
-            <a:pPr algn="l"/>
-            <a:r>
-              <a:rPr sz="1300" b="1">
-                <a:solidFill>
-                  <a:srgbClr val="42A5F5"/>
+          <a:bodyPr rtlCol="0" anchor="ctr" wrap="square"/>
+          <a:lstStyle/>
+          <a:p>
+            <a:pPr algn="l">
+              <a:lnSpc>
+                <a:spcPct val="130000"/>
+              </a:lnSpc>
+            </a:pPr>
+            <a:r>
+              <a:rPr sz="800" b="0">
+                <a:solidFill>
+                  <a:srgbClr val="4A4540"/>
                 </a:solidFill>
                 <a:latin typeface="Hiragino Sans"/>
               </a:rPr>
-              <a:t>18.8%</a:t>
-            </a:r>
-          </a:p>
-        </p:txBody>
-      </p:sp>
-      <p:sp>
-        <p:nvSpPr>
-          <p:cNvPr id="11" name="Rectangle 10"/>
+              <a:t>出典: Anthropic "What 81,000 people want from AI"</a:t>
+            </a:r>
+          </a:p>
+        </p:txBody>
+      </p:sp>
+      <p:sp>
+        <p:nvSpPr>
+          <p:cNvPr id="9" name="Rectangle 8"/>
           <p:cNvSpPr/>
           <p:nvPr/>
         </p:nvSpPr>
         <p:spPr>
           <a:xfrm>
-            <a:off x="274320" y="2514600"/>
-            <a:ext cx="3566160" cy="228600"/>
+            <a:off x="320040" y="6720000"/>
+            <a:ext cx="3474720" cy="14977"/>
           </a:xfrm>
           <a:prstGeom prst="rect">
             <a:avLst/>
@@ -4047,608 +3930,22 @@
           </a:fontRef>
         </p:style>
         <p:txBody>
-          <a:bodyPr rtlCol="0" anchor="ctr"/>
-          <a:lstStyle/>
-          <a:p>
-            <a:pPr algn="l"/>
-            <a:r>
-              <a:rPr sz="1100">
-                <a:solidFill>
-                  <a:srgbClr val="A8A29E"/>
+          <a:bodyPr rtlCol="0" anchor="ctr" wrap="square"/>
+          <a:lstStyle/>
+          <a:p>
+            <a:pPr algn="l">
+              <a:lnSpc>
+                <a:spcPct val="130000"/>
+              </a:lnSpc>
+            </a:pPr>
+            <a:r>
+              <a:rPr sz="900" b="0">
+                <a:solidFill>
+                  <a:srgbClr val="C9A02D"/>
                 </a:solidFill>
                 <a:latin typeface="Hiragino Sans"/>
               </a:rPr>
-              <a:t>個人的変容</a:t>
-            </a:r>
-          </a:p>
-        </p:txBody>
-      </p:sp>
-      <p:sp>
-        <p:nvSpPr>
-          <p:cNvPr id="12" name="Rounded Rectangle 11"/>
-          <p:cNvSpPr/>
-          <p:nvPr/>
-        </p:nvSpPr>
-        <p:spPr>
-          <a:xfrm>
-            <a:off x="274320" y="2743200"/>
-            <a:ext cx="3031236" cy="320040"/>
-          </a:xfrm>
-          <a:prstGeom prst="roundRect">
-            <a:avLst>
-              <a:gd name="adj" fmla="val 15000"/>
-            </a:avLst>
-          </a:prstGeom>
-          <a:solidFill>
-            <a:srgbClr val="2C2723"/>
-          </a:solidFill>
-          <a:ln>
-            <a:noFill/>
-          </a:ln>
-        </p:spPr>
-        <p:style>
-          <a:lnRef idx="1">
-            <a:schemeClr val="accent1"/>
-          </a:lnRef>
-          <a:fillRef idx="3">
-            <a:schemeClr val="accent1"/>
-          </a:fillRef>
-          <a:effectRef idx="2">
-            <a:schemeClr val="accent1"/>
-          </a:effectRef>
-          <a:fontRef idx="minor">
-            <a:schemeClr val="lt1"/>
-          </a:fontRef>
-        </p:style>
-        <p:txBody>
-          <a:bodyPr rtlCol="0" anchor="ctr"/>
-          <a:lstStyle/>
-          <a:p>
-            <a:pPr algn="ctr"/>
-          </a:p>
-        </p:txBody>
-      </p:sp>
-      <p:sp>
-        <p:nvSpPr>
-          <p:cNvPr id="13" name="Rounded Rectangle 12"/>
-          <p:cNvSpPr/>
-          <p:nvPr/>
-        </p:nvSpPr>
-        <p:spPr>
-          <a:xfrm>
-            <a:off x="274320" y="2743200"/>
-            <a:ext cx="1661117" cy="320040"/>
-          </a:xfrm>
-          <a:prstGeom prst="roundRect">
-            <a:avLst>
-              <a:gd name="adj" fmla="val 15000"/>
-            </a:avLst>
-          </a:prstGeom>
-          <a:solidFill>
-            <a:srgbClr val="FFA726"/>
-          </a:solidFill>
-          <a:ln>
-            <a:noFill/>
-          </a:ln>
-        </p:spPr>
-        <p:style>
-          <a:lnRef idx="1">
-            <a:schemeClr val="accent1"/>
-          </a:lnRef>
-          <a:fillRef idx="3">
-            <a:schemeClr val="accent1"/>
-          </a:fillRef>
-          <a:effectRef idx="2">
-            <a:schemeClr val="accent1"/>
-          </a:effectRef>
-          <a:fontRef idx="minor">
-            <a:schemeClr val="lt1"/>
-          </a:fontRef>
-        </p:style>
-        <p:txBody>
-          <a:bodyPr rtlCol="0" anchor="ctr"/>
-          <a:lstStyle/>
-          <a:p>
-            <a:pPr algn="ctr"/>
-          </a:p>
-        </p:txBody>
-      </p:sp>
-      <p:sp>
-        <p:nvSpPr>
-          <p:cNvPr id="14" name="Rectangle 13"/>
-          <p:cNvSpPr/>
-          <p:nvPr/>
-        </p:nvSpPr>
-        <p:spPr>
-          <a:xfrm>
-            <a:off x="3374136" y="2743200"/>
-            <a:ext cx="548640" cy="320040"/>
-          </a:xfrm>
-          <a:prstGeom prst="rect">
-            <a:avLst/>
-          </a:prstGeom>
-          <a:noFill/>
-          <a:ln>
-            <a:noFill/>
-          </a:ln>
-        </p:spPr>
-        <p:style>
-          <a:lnRef idx="1">
-            <a:schemeClr val="accent1"/>
-          </a:lnRef>
-          <a:fillRef idx="3">
-            <a:schemeClr val="accent1"/>
-          </a:fillRef>
-          <a:effectRef idx="2">
-            <a:schemeClr val="accent1"/>
-          </a:effectRef>
-          <a:fontRef idx="minor">
-            <a:schemeClr val="lt1"/>
-          </a:fontRef>
-        </p:style>
-        <p:txBody>
-          <a:bodyPr rtlCol="0" anchor="ctr"/>
-          <a:lstStyle/>
-          <a:p>
-            <a:pPr algn="l"/>
-            <a:r>
-              <a:rPr sz="1300" b="1">
-                <a:solidFill>
-                  <a:srgbClr val="FFA726"/>
-                </a:solidFill>
-                <a:latin typeface="Hiragino Sans"/>
-              </a:rPr>
-              <a:t>13.7%</a:t>
-            </a:r>
-          </a:p>
-        </p:txBody>
-      </p:sp>
-      <p:sp>
-        <p:nvSpPr>
-          <p:cNvPr id="15" name="Rectangle 14"/>
-          <p:cNvSpPr/>
-          <p:nvPr/>
-        </p:nvSpPr>
-        <p:spPr>
-          <a:xfrm>
-            <a:off x="274320" y="3200400"/>
-            <a:ext cx="3566160" cy="228600"/>
-          </a:xfrm>
-          <a:prstGeom prst="rect">
-            <a:avLst/>
-          </a:prstGeom>
-          <a:noFill/>
-          <a:ln>
-            <a:noFill/>
-          </a:ln>
-        </p:spPr>
-        <p:style>
-          <a:lnRef idx="1">
-            <a:schemeClr val="accent1"/>
-          </a:lnRef>
-          <a:fillRef idx="3">
-            <a:schemeClr val="accent1"/>
-          </a:fillRef>
-          <a:effectRef idx="2">
-            <a:schemeClr val="accent1"/>
-          </a:effectRef>
-          <a:fontRef idx="minor">
-            <a:schemeClr val="lt1"/>
-          </a:fontRef>
-        </p:style>
-        <p:txBody>
-          <a:bodyPr rtlCol="0" anchor="ctr"/>
-          <a:lstStyle/>
-          <a:p>
-            <a:pPr algn="l"/>
-            <a:r>
-              <a:rPr sz="1100">
-                <a:solidFill>
-                  <a:srgbClr val="A8A29E"/>
-                </a:solidFill>
-                <a:latin typeface="Hiragino Sans"/>
-              </a:rPr>
-              <a:t>生活管理</a:t>
-            </a:r>
-          </a:p>
-        </p:txBody>
-      </p:sp>
-      <p:sp>
-        <p:nvSpPr>
-          <p:cNvPr id="16" name="Rounded Rectangle 15"/>
-          <p:cNvSpPr/>
-          <p:nvPr/>
-        </p:nvSpPr>
-        <p:spPr>
-          <a:xfrm>
-            <a:off x="274320" y="3429000"/>
-            <a:ext cx="3031236" cy="320040"/>
-          </a:xfrm>
-          <a:prstGeom prst="roundRect">
-            <a:avLst>
-              <a:gd name="adj" fmla="val 15000"/>
-            </a:avLst>
-          </a:prstGeom>
-          <a:solidFill>
-            <a:srgbClr val="2C2723"/>
-          </a:solidFill>
-          <a:ln>
-            <a:noFill/>
-          </a:ln>
-        </p:spPr>
-        <p:style>
-          <a:lnRef idx="1">
-            <a:schemeClr val="accent1"/>
-          </a:lnRef>
-          <a:fillRef idx="3">
-            <a:schemeClr val="accent1"/>
-          </a:fillRef>
-          <a:effectRef idx="2">
-            <a:schemeClr val="accent1"/>
-          </a:effectRef>
-          <a:fontRef idx="minor">
-            <a:schemeClr val="lt1"/>
-          </a:fontRef>
-        </p:style>
-        <p:txBody>
-          <a:bodyPr rtlCol="0" anchor="ctr"/>
-          <a:lstStyle/>
-          <a:p>
-            <a:pPr algn="ctr"/>
-          </a:p>
-        </p:txBody>
-      </p:sp>
-      <p:sp>
-        <p:nvSpPr>
-          <p:cNvPr id="17" name="Rounded Rectangle 16"/>
-          <p:cNvSpPr/>
-          <p:nvPr/>
-        </p:nvSpPr>
-        <p:spPr>
-          <a:xfrm>
-            <a:off x="274320" y="3429000"/>
-            <a:ext cx="1636867" cy="320040"/>
-          </a:xfrm>
-          <a:prstGeom prst="roundRect">
-            <a:avLst>
-              <a:gd name="adj" fmla="val 15000"/>
-            </a:avLst>
-          </a:prstGeom>
-          <a:solidFill>
-            <a:srgbClr val="66BB6A"/>
-          </a:solidFill>
-          <a:ln>
-            <a:noFill/>
-          </a:ln>
-        </p:spPr>
-        <p:style>
-          <a:lnRef idx="1">
-            <a:schemeClr val="accent1"/>
-          </a:lnRef>
-          <a:fillRef idx="3">
-            <a:schemeClr val="accent1"/>
-          </a:fillRef>
-          <a:effectRef idx="2">
-            <a:schemeClr val="accent1"/>
-          </a:effectRef>
-          <a:fontRef idx="minor">
-            <a:schemeClr val="lt1"/>
-          </a:fontRef>
-        </p:style>
-        <p:txBody>
-          <a:bodyPr rtlCol="0" anchor="ctr"/>
-          <a:lstStyle/>
-          <a:p>
-            <a:pPr algn="ctr"/>
-          </a:p>
-        </p:txBody>
-      </p:sp>
-      <p:sp>
-        <p:nvSpPr>
-          <p:cNvPr id="18" name="Rectangle 17"/>
-          <p:cNvSpPr/>
-          <p:nvPr/>
-        </p:nvSpPr>
-        <p:spPr>
-          <a:xfrm>
-            <a:off x="3374136" y="3429000"/>
-            <a:ext cx="548640" cy="320040"/>
-          </a:xfrm>
-          <a:prstGeom prst="rect">
-            <a:avLst/>
-          </a:prstGeom>
-          <a:noFill/>
-          <a:ln>
-            <a:noFill/>
-          </a:ln>
-        </p:spPr>
-        <p:style>
-          <a:lnRef idx="1">
-            <a:schemeClr val="accent1"/>
-          </a:lnRef>
-          <a:fillRef idx="3">
-            <a:schemeClr val="accent1"/>
-          </a:fillRef>
-          <a:effectRef idx="2">
-            <a:schemeClr val="accent1"/>
-          </a:effectRef>
-          <a:fontRef idx="minor">
-            <a:schemeClr val="lt1"/>
-          </a:fontRef>
-        </p:style>
-        <p:txBody>
-          <a:bodyPr rtlCol="0" anchor="ctr"/>
-          <a:lstStyle/>
-          <a:p>
-            <a:pPr algn="l"/>
-            <a:r>
-              <a:rPr sz="1300" b="1">
-                <a:solidFill>
-                  <a:srgbClr val="66BB6A"/>
-                </a:solidFill>
-                <a:latin typeface="Hiragino Sans"/>
-              </a:rPr>
-              <a:t>13.5%</a:t>
-            </a:r>
-          </a:p>
-        </p:txBody>
-      </p:sp>
-      <p:sp>
-        <p:nvSpPr>
-          <p:cNvPr id="19" name="Rectangle 18"/>
-          <p:cNvSpPr/>
-          <p:nvPr/>
-        </p:nvSpPr>
-        <p:spPr>
-          <a:xfrm>
-            <a:off x="274320" y="3886200"/>
-            <a:ext cx="3566160" cy="228600"/>
-          </a:xfrm>
-          <a:prstGeom prst="rect">
-            <a:avLst/>
-          </a:prstGeom>
-          <a:noFill/>
-          <a:ln>
-            <a:noFill/>
-          </a:ln>
-        </p:spPr>
-        <p:style>
-          <a:lnRef idx="1">
-            <a:schemeClr val="accent1"/>
-          </a:lnRef>
-          <a:fillRef idx="3">
-            <a:schemeClr val="accent1"/>
-          </a:fillRef>
-          <a:effectRef idx="2">
-            <a:schemeClr val="accent1"/>
-          </a:effectRef>
-          <a:fontRef idx="minor">
-            <a:schemeClr val="lt1"/>
-          </a:fontRef>
-        </p:style>
-        <p:txBody>
-          <a:bodyPr rtlCol="0" anchor="ctr"/>
-          <a:lstStyle/>
-          <a:p>
-            <a:pPr algn="l"/>
-            <a:r>
-              <a:rPr sz="1100">
-                <a:solidFill>
-                  <a:srgbClr val="A8A29E"/>
-                </a:solidFill>
-                <a:latin typeface="Hiragino Sans"/>
-              </a:rPr>
-              <a:t>時間的自由</a:t>
-            </a:r>
-          </a:p>
-        </p:txBody>
-      </p:sp>
-      <p:sp>
-        <p:nvSpPr>
-          <p:cNvPr id="20" name="Rounded Rectangle 19"/>
-          <p:cNvSpPr/>
-          <p:nvPr/>
-        </p:nvSpPr>
-        <p:spPr>
-          <a:xfrm>
-            <a:off x="274320" y="4114800"/>
-            <a:ext cx="3031236" cy="320040"/>
-          </a:xfrm>
-          <a:prstGeom prst="roundRect">
-            <a:avLst>
-              <a:gd name="adj" fmla="val 15000"/>
-            </a:avLst>
-          </a:prstGeom>
-          <a:solidFill>
-            <a:srgbClr val="2C2723"/>
-          </a:solidFill>
-          <a:ln>
-            <a:noFill/>
-          </a:ln>
-        </p:spPr>
-        <p:style>
-          <a:lnRef idx="1">
-            <a:schemeClr val="accent1"/>
-          </a:lnRef>
-          <a:fillRef idx="3">
-            <a:schemeClr val="accent1"/>
-          </a:fillRef>
-          <a:effectRef idx="2">
-            <a:schemeClr val="accent1"/>
-          </a:effectRef>
-          <a:fontRef idx="minor">
-            <a:schemeClr val="lt1"/>
-          </a:fontRef>
-        </p:style>
-        <p:txBody>
-          <a:bodyPr rtlCol="0" anchor="ctr"/>
-          <a:lstStyle/>
-          <a:p>
-            <a:pPr algn="ctr"/>
-          </a:p>
-        </p:txBody>
-      </p:sp>
-      <p:sp>
-        <p:nvSpPr>
-          <p:cNvPr id="21" name="Rounded Rectangle 20"/>
-          <p:cNvSpPr/>
-          <p:nvPr/>
-        </p:nvSpPr>
-        <p:spPr>
-          <a:xfrm>
-            <a:off x="274320" y="4114800"/>
-            <a:ext cx="1345868" cy="320040"/>
-          </a:xfrm>
-          <a:prstGeom prst="roundRect">
-            <a:avLst>
-              <a:gd name="adj" fmla="val 15000"/>
-            </a:avLst>
-          </a:prstGeom>
-          <a:solidFill>
-            <a:srgbClr val="26C6DA"/>
-          </a:solidFill>
-          <a:ln>
-            <a:noFill/>
-          </a:ln>
-        </p:spPr>
-        <p:style>
-          <a:lnRef idx="1">
-            <a:schemeClr val="accent1"/>
-          </a:lnRef>
-          <a:fillRef idx="3">
-            <a:schemeClr val="accent1"/>
-          </a:fillRef>
-          <a:effectRef idx="2">
-            <a:schemeClr val="accent1"/>
-          </a:effectRef>
-          <a:fontRef idx="minor">
-            <a:schemeClr val="lt1"/>
-          </a:fontRef>
-        </p:style>
-        <p:txBody>
-          <a:bodyPr rtlCol="0" anchor="ctr"/>
-          <a:lstStyle/>
-          <a:p>
-            <a:pPr algn="ctr"/>
-          </a:p>
-        </p:txBody>
-      </p:sp>
-      <p:sp>
-        <p:nvSpPr>
-          <p:cNvPr id="22" name="Rectangle 21"/>
-          <p:cNvSpPr/>
-          <p:nvPr/>
-        </p:nvSpPr>
-        <p:spPr>
-          <a:xfrm>
-            <a:off x="3374136" y="4114800"/>
-            <a:ext cx="548640" cy="320040"/>
-          </a:xfrm>
-          <a:prstGeom prst="rect">
-            <a:avLst/>
-          </a:prstGeom>
-          <a:noFill/>
-          <a:ln>
-            <a:noFill/>
-          </a:ln>
-        </p:spPr>
-        <p:style>
-          <a:lnRef idx="1">
-            <a:schemeClr val="accent1"/>
-          </a:lnRef>
-          <a:fillRef idx="3">
-            <a:schemeClr val="accent1"/>
-          </a:fillRef>
-          <a:effectRef idx="2">
-            <a:schemeClr val="accent1"/>
-          </a:effectRef>
-          <a:fontRef idx="minor">
-            <a:schemeClr val="lt1"/>
-          </a:fontRef>
-        </p:style>
-        <p:txBody>
-          <a:bodyPr rtlCol="0" anchor="ctr"/>
-          <a:lstStyle/>
-          <a:p>
-            <a:pPr algn="l"/>
-            <a:r>
-              <a:rPr sz="1300" b="1">
-                <a:solidFill>
-                  <a:srgbClr val="26C6DA"/>
-                </a:solidFill>
-                <a:latin typeface="Hiragino Sans"/>
-              </a:rPr>
-              <a:t>11.1%</a:t>
-            </a:r>
-          </a:p>
-        </p:txBody>
-      </p:sp>
-      <p:sp>
-        <p:nvSpPr>
-          <p:cNvPr id="23" name="Rectangle 22"/>
-          <p:cNvSpPr/>
-          <p:nvPr/>
-        </p:nvSpPr>
-        <p:spPr>
-          <a:xfrm>
-            <a:off x="274320" y="5029200"/>
-            <a:ext cx="3566160" cy="640080"/>
-          </a:xfrm>
-          <a:prstGeom prst="rect">
-            <a:avLst/>
-          </a:prstGeom>
-          <a:noFill/>
-          <a:ln>
-            <a:noFill/>
-          </a:ln>
-        </p:spPr>
-        <p:style>
-          <a:lnRef idx="1">
-            <a:schemeClr val="accent1"/>
-          </a:lnRef>
-          <a:fillRef idx="3">
-            <a:schemeClr val="accent1"/>
-          </a:fillRef>
-          <a:effectRef idx="2">
-            <a:schemeClr val="accent1"/>
-          </a:effectRef>
-          <a:fontRef idx="minor">
-            <a:schemeClr val="lt1"/>
-          </a:fontRef>
-        </p:style>
-        <p:txBody>
-          <a:bodyPr rtlCol="0" anchor="ctr" wrap="square"/>
-          <a:lstStyle/>
-          <a:p>
-            <a:pPr algn="l">
-              <a:spcAft>
-                <a:spcPts val="400"/>
-              </a:spcAft>
-            </a:pPr>
-            <a:r>
-              <a:rPr sz="1200" b="0">
-                <a:solidFill>
-                  <a:srgbClr val="57534E"/>
-                </a:solidFill>
-                <a:latin typeface="Hiragino Sans"/>
-              </a:rPr>
-              <a:t>上位3つで46%。どれも単純な</a:t>
-            </a:r>
-          </a:p>
-          <a:p>
-            <a:pPr algn="l">
-              <a:spcAft>
-                <a:spcPts val="400"/>
-              </a:spcAft>
-            </a:pPr>
-            <a:r>
-              <a:rPr sz="1200" b="0">
-                <a:solidFill>
-                  <a:srgbClr val="57534E"/>
-                </a:solidFill>
-                <a:latin typeface="Hiragino Sans"/>
-              </a:rPr>
-              <a:t>「生産性向上」には収まらない</a:t>
+              <a:t>HARMONIC insight</a:t>
             </a:r>
           </a:p>
         </p:txBody>
@@ -4667,7 +3964,7 @@
     <p:bg>
       <p:bgPr>
         <a:solidFill>
-          <a:srgbClr val="1C1917"/>
+          <a:srgbClr val="12100E"/>
         </a:solidFill>
         <a:effectLst/>
       </p:bgPr>
@@ -4687,51 +3984,8 @@
         </p:nvSpPr>
         <p:spPr>
           <a:xfrm>
-            <a:off x="0" y="0"/>
-            <a:ext cx="4114800" cy="54864"/>
-          </a:xfrm>
-          <a:prstGeom prst="rect">
-            <a:avLst/>
-          </a:prstGeom>
-          <a:solidFill>
-            <a:srgbClr val="B8942F"/>
-          </a:solidFill>
-          <a:ln>
-            <a:noFill/>
-          </a:ln>
-        </p:spPr>
-        <p:style>
-          <a:lnRef idx="1">
-            <a:schemeClr val="accent1"/>
-          </a:lnRef>
-          <a:fillRef idx="3">
-            <a:schemeClr val="accent1"/>
-          </a:fillRef>
-          <a:effectRef idx="2">
-            <a:schemeClr val="accent1"/>
-          </a:effectRef>
-          <a:fontRef idx="minor">
-            <a:schemeClr val="lt1"/>
-          </a:fontRef>
-        </p:style>
-        <p:txBody>
-          <a:bodyPr rtlCol="0" anchor="ctr"/>
-          <a:lstStyle/>
-          <a:p>
-            <a:pPr algn="ctr"/>
-          </a:p>
-        </p:txBody>
-      </p:sp>
-      <p:sp>
-        <p:nvSpPr>
-          <p:cNvPr id="3" name="Rectangle 2"/>
-          <p:cNvSpPr/>
-          <p:nvPr/>
-        </p:nvSpPr>
-        <p:spPr>
-          <a:xfrm>
-            <a:off x="274320" y="6675120"/>
-            <a:ext cx="3566160" cy="365760"/>
+            <a:off x="320040" y="548640"/>
+            <a:ext cx="3474720" cy="66568"/>
           </a:xfrm>
           <a:prstGeom prst="rect">
             <a:avLst/>
@@ -4759,16 +4013,79 @@
           <a:bodyPr rtlCol="0" anchor="ctr" wrap="square"/>
           <a:lstStyle/>
           <a:p>
-            <a:pPr algn="l"/>
-            <a:r>
-              <a:rPr sz="900">
-                <a:solidFill>
-                  <a:srgbClr val="B8942F"/>
+            <a:pPr algn="l">
+              <a:lnSpc>
+                <a:spcPct val="130000"/>
+              </a:lnSpc>
+            </a:pPr>
+            <a:r>
+              <a:rPr sz="2000" b="0">
+                <a:solidFill>
+                  <a:srgbClr val="78716C"/>
                 </a:solidFill>
                 <a:latin typeface="Hiragino Sans"/>
               </a:rPr>
-              <a:t>HARMONIC insight</a:t>
-            </a:r>
+              <a:t>レポートが示した</a:t>
+            </a:r>
+          </a:p>
+          <a:p>
+            <a:pPr algn="l">
+              <a:lnSpc>
+                <a:spcPct val="130000"/>
+              </a:lnSpc>
+            </a:pPr>
+            <a:r>
+              <a:rPr sz="2000" b="0">
+                <a:solidFill>
+                  <a:srgbClr val="78716C"/>
+                </a:solidFill>
+                <a:latin typeface="Hiragino Sans"/>
+              </a:rPr>
+              <a:t>回答トップ4</a:t>
+            </a:r>
+          </a:p>
+        </p:txBody>
+      </p:sp>
+      <p:sp>
+        <p:nvSpPr>
+          <p:cNvPr id="3" name="Rectangle 2"/>
+          <p:cNvSpPr/>
+          <p:nvPr/>
+        </p:nvSpPr>
+        <p:spPr>
+          <a:xfrm>
+            <a:off x="320040" y="1143000"/>
+            <a:ext cx="914400" cy="13716"/>
+          </a:xfrm>
+          <a:prstGeom prst="rect">
+            <a:avLst/>
+          </a:prstGeom>
+          <a:solidFill>
+            <a:srgbClr val="C9A02D"/>
+          </a:solidFill>
+          <a:ln>
+            <a:noFill/>
+          </a:ln>
+        </p:spPr>
+        <p:style>
+          <a:lnRef idx="1">
+            <a:schemeClr val="accent1"/>
+          </a:lnRef>
+          <a:fillRef idx="3">
+            <a:schemeClr val="accent1"/>
+          </a:fillRef>
+          <a:effectRef idx="2">
+            <a:schemeClr val="accent1"/>
+          </a:effectRef>
+          <a:fontRef idx="minor">
+            <a:schemeClr val="lt1"/>
+          </a:fontRef>
+        </p:style>
+        <p:txBody>
+          <a:bodyPr rtlCol="0" anchor="ctr"/>
+          <a:lstStyle/>
+          <a:p>
+            <a:pPr algn="ctr"/>
           </a:p>
         </p:txBody>
       </p:sp>
@@ -4780,8 +4097,8 @@
         </p:nvSpPr>
         <p:spPr>
           <a:xfrm>
-            <a:off x="274320" y="1143000"/>
-            <a:ext cx="3566160" cy="1828800"/>
+            <a:off x="320040" y="1371600"/>
+            <a:ext cx="3474720" cy="53254"/>
           </a:xfrm>
           <a:prstGeom prst="rect">
             <a:avLst/>
@@ -4810,50 +4127,18 @@
           <a:lstStyle/>
           <a:p>
             <a:pPr algn="l">
-              <a:spcAft>
-                <a:spcPts val="400"/>
-              </a:spcAft>
+              <a:lnSpc>
+                <a:spcPct val="130000"/>
+              </a:lnSpc>
             </a:pPr>
             <a:r>
-              <a:rPr sz="2400" b="1">
-                <a:solidFill>
-                  <a:srgbClr val="FFFFFF"/>
+              <a:rPr sz="3200" b="1">
+                <a:solidFill>
+                  <a:srgbClr val="4DD0E1"/>
                 </a:solidFill>
                 <a:latin typeface="Hiragino Sans"/>
               </a:rPr>
-              <a:t>「なぜそれが</a:t>
-            </a:r>
-          </a:p>
-          <a:p>
-            <a:pPr algn="l">
-              <a:spcAft>
-                <a:spcPts val="400"/>
-              </a:spcAft>
-            </a:pPr>
-            <a:r>
-              <a:rPr sz="2400" b="1">
-                <a:solidFill>
-                  <a:srgbClr val="FFFFFF"/>
-                </a:solidFill>
-                <a:latin typeface="Hiragino Sans"/>
-              </a:rPr>
-              <a:t>  欲しいの？」</a:t>
-            </a:r>
-          </a:p>
-          <a:p>
-            <a:pPr algn="l">
-              <a:spcAft>
-                <a:spcPts val="400"/>
-              </a:spcAft>
-            </a:pPr>
-            <a:r>
-              <a:rPr sz="2400" b="1">
-                <a:solidFill>
-                  <a:srgbClr val="FFFFFF"/>
-                </a:solidFill>
-                <a:latin typeface="Hiragino Sans"/>
-              </a:rPr>
-              <a:t>と深く聞くと…</a:t>
+              <a:t>19%</a:t>
             </a:r>
           </a:p>
         </p:txBody>
@@ -4866,103 +4151,8 @@
         </p:nvSpPr>
         <p:spPr>
           <a:xfrm>
-            <a:off x="274320" y="3200400"/>
-            <a:ext cx="3566160" cy="18288"/>
-          </a:xfrm>
-          <a:prstGeom prst="rect">
-            <a:avLst/>
-          </a:prstGeom>
-          <a:solidFill>
-            <a:srgbClr val="B8942F"/>
-          </a:solidFill>
-          <a:ln>
-            <a:noFill/>
-          </a:ln>
-        </p:spPr>
-        <p:style>
-          <a:lnRef idx="1">
-            <a:schemeClr val="accent1"/>
-          </a:lnRef>
-          <a:fillRef idx="3">
-            <a:schemeClr val="accent1"/>
-          </a:fillRef>
-          <a:effectRef idx="2">
-            <a:schemeClr val="accent1"/>
-          </a:effectRef>
-          <a:fontRef idx="minor">
-            <a:schemeClr val="lt1"/>
-          </a:fontRef>
-        </p:style>
-        <p:txBody>
-          <a:bodyPr rtlCol="0" anchor="ctr"/>
-          <a:lstStyle/>
-          <a:p>
-            <a:pPr algn="ctr"/>
-          </a:p>
-        </p:txBody>
-      </p:sp>
-      <p:sp>
-        <p:nvSpPr>
-          <p:cNvPr id="6" name="Oval 5"/>
-          <p:cNvSpPr/>
-          <p:nvPr/>
-        </p:nvSpPr>
-        <p:spPr>
-          <a:xfrm>
-            <a:off x="274320" y="3429000"/>
-            <a:ext cx="320040" cy="320040"/>
-          </a:xfrm>
-          <a:prstGeom prst="ellipse">
-            <a:avLst/>
-          </a:prstGeom>
-          <a:solidFill>
-            <a:srgbClr val="2C2723"/>
-          </a:solidFill>
-          <a:ln>
-            <a:noFill/>
-          </a:ln>
-        </p:spPr>
-        <p:style>
-          <a:lnRef idx="1">
-            <a:schemeClr val="accent1"/>
-          </a:lnRef>
-          <a:fillRef idx="3">
-            <a:schemeClr val="accent1"/>
-          </a:fillRef>
-          <a:effectRef idx="2">
-            <a:schemeClr val="accent1"/>
-          </a:effectRef>
-          <a:fontRef idx="minor">
-            <a:schemeClr val="lt1"/>
-          </a:fontRef>
-        </p:style>
-        <p:txBody>
-          <a:bodyPr rtlCol="0" anchor="ctr"/>
-          <a:lstStyle/>
-          <a:p>
-            <a:pPr algn="ctr"/>
-            <a:r>
-              <a:rPr sz="1400" b="1">
-                <a:solidFill>
-                  <a:srgbClr val="FFA726"/>
-                </a:solidFill>
-                <a:latin typeface="Hiragino Sans"/>
-              </a:rPr>
-              <a:t>14%</a:t>
-            </a:r>
-          </a:p>
-        </p:txBody>
-      </p:sp>
-      <p:sp>
-        <p:nvSpPr>
-          <p:cNvPr id="7" name="Rectangle 6"/>
-          <p:cNvSpPr/>
-          <p:nvPr/>
-        </p:nvSpPr>
-        <p:spPr>
-          <a:xfrm>
-            <a:off x="662940" y="3429000"/>
-            <a:ext cx="3177540" cy="320040"/>
+            <a:off x="320040" y="1791600"/>
+            <a:ext cx="3474720" cy="21634"/>
           </a:xfrm>
           <a:prstGeom prst="rect">
             <a:avLst/>
@@ -4987,84 +4177,36 @@
           </a:fontRef>
         </p:style>
         <p:txBody>
-          <a:bodyPr rtlCol="0" anchor="ctr"/>
-          <a:lstStyle/>
-          <a:p>
-            <a:pPr algn="ctr"/>
-            <a:r>
-              <a:rPr sz="1300">
-                <a:solidFill>
-                  <a:srgbClr val="FFFFFF"/>
+          <a:bodyPr rtlCol="0" anchor="ctr" wrap="square"/>
+          <a:lstStyle/>
+          <a:p>
+            <a:pPr algn="l">
+              <a:lnSpc>
+                <a:spcPct val="130000"/>
+              </a:lnSpc>
+            </a:pPr>
+            <a:r>
+              <a:rPr sz="1300" b="0">
+                <a:solidFill>
+                  <a:srgbClr val="78716C"/>
                 </a:solidFill>
                 <a:latin typeface="Hiragino Sans"/>
               </a:rPr>
-              <a:t>自分自身の成長</a:t>
-            </a:r>
-          </a:p>
-        </p:txBody>
-      </p:sp>
-      <p:sp>
-        <p:nvSpPr>
-          <p:cNvPr id="8" name="Oval 7"/>
+              <a:t>職業的卓越性</a:t>
+            </a:r>
+          </a:p>
+        </p:txBody>
+      </p:sp>
+      <p:sp>
+        <p:nvSpPr>
+          <p:cNvPr id="6" name="Rectangle 5"/>
           <p:cNvSpPr/>
           <p:nvPr/>
         </p:nvSpPr>
         <p:spPr>
           <a:xfrm>
-            <a:off x="274320" y="3886200"/>
-            <a:ext cx="320040" cy="320040"/>
-          </a:xfrm>
-          <a:prstGeom prst="ellipse">
-            <a:avLst/>
-          </a:prstGeom>
-          <a:solidFill>
-            <a:srgbClr val="2C2723"/>
-          </a:solidFill>
-          <a:ln>
-            <a:noFill/>
-          </a:ln>
-        </p:spPr>
-        <p:style>
-          <a:lnRef idx="1">
-            <a:schemeClr val="accent1"/>
-          </a:lnRef>
-          <a:fillRef idx="3">
-            <a:schemeClr val="accent1"/>
-          </a:fillRef>
-          <a:effectRef idx="2">
-            <a:schemeClr val="accent1"/>
-          </a:effectRef>
-          <a:fontRef idx="minor">
-            <a:schemeClr val="lt1"/>
-          </a:fontRef>
-        </p:style>
-        <p:txBody>
-          <a:bodyPr rtlCol="0" anchor="ctr"/>
-          <a:lstStyle/>
-          <a:p>
-            <a:pPr algn="ctr"/>
-            <a:r>
-              <a:rPr sz="1400" b="1">
-                <a:solidFill>
-                  <a:srgbClr val="66BB6A"/>
-                </a:solidFill>
-                <a:latin typeface="Hiragino Sans"/>
-              </a:rPr>
-              <a:t>14%</a:t>
-            </a:r>
-          </a:p>
-        </p:txBody>
-      </p:sp>
-      <p:sp>
-        <p:nvSpPr>
-          <p:cNvPr id="9" name="Rectangle 8"/>
-          <p:cNvSpPr/>
-          <p:nvPr/>
-        </p:nvSpPr>
-        <p:spPr>
-          <a:xfrm>
-            <a:off x="662940" y="3886200"/>
-            <a:ext cx="3177540" cy="320040"/>
+            <a:off x="320040" y="2286000"/>
+            <a:ext cx="3474720" cy="53254"/>
           </a:xfrm>
           <a:prstGeom prst="rect">
             <a:avLst/>
@@ -5089,84 +4231,36 @@
           </a:fontRef>
         </p:style>
         <p:txBody>
-          <a:bodyPr rtlCol="0" anchor="ctr"/>
-          <a:lstStyle/>
-          <a:p>
-            <a:pPr algn="ctr"/>
-            <a:r>
-              <a:rPr sz="1300">
-                <a:solidFill>
-                  <a:srgbClr val="FFFFFF"/>
+          <a:bodyPr rtlCol="0" anchor="ctr" wrap="square"/>
+          <a:lstStyle/>
+          <a:p>
+            <a:pPr algn="l">
+              <a:lnSpc>
+                <a:spcPct val="130000"/>
+              </a:lnSpc>
+            </a:pPr>
+            <a:r>
+              <a:rPr sz="3200" b="1">
+                <a:solidFill>
+                  <a:srgbClr val="FFB300"/>
                 </a:solidFill>
                 <a:latin typeface="Hiragino Sans"/>
               </a:rPr>
-              <a:t>認知的負担を減らしたい</a:t>
-            </a:r>
-          </a:p>
-        </p:txBody>
-      </p:sp>
-      <p:sp>
-        <p:nvSpPr>
-          <p:cNvPr id="10" name="Oval 9"/>
+              <a:t>14%</a:t>
+            </a:r>
+          </a:p>
+        </p:txBody>
+      </p:sp>
+      <p:sp>
+        <p:nvSpPr>
+          <p:cNvPr id="7" name="Rectangle 6"/>
           <p:cNvSpPr/>
           <p:nvPr/>
         </p:nvSpPr>
         <p:spPr>
           <a:xfrm>
-            <a:off x="274320" y="4343400"/>
-            <a:ext cx="320040" cy="320040"/>
-          </a:xfrm>
-          <a:prstGeom prst="ellipse">
-            <a:avLst/>
-          </a:prstGeom>
-          <a:solidFill>
-            <a:srgbClr val="2C2723"/>
-          </a:solidFill>
-          <a:ln>
-            <a:noFill/>
-          </a:ln>
-        </p:spPr>
-        <p:style>
-          <a:lnRef idx="1">
-            <a:schemeClr val="accent1"/>
-          </a:lnRef>
-          <a:fillRef idx="3">
-            <a:schemeClr val="accent1"/>
-          </a:fillRef>
-          <a:effectRef idx="2">
-            <a:schemeClr val="accent1"/>
-          </a:effectRef>
-          <a:fontRef idx="minor">
-            <a:schemeClr val="lt1"/>
-          </a:fontRef>
-        </p:style>
-        <p:txBody>
-          <a:bodyPr rtlCol="0" anchor="ctr"/>
-          <a:lstStyle/>
-          <a:p>
-            <a:pPr algn="ctr"/>
-            <a:r>
-              <a:rPr sz="1400" b="1">
-                <a:solidFill>
-                  <a:srgbClr val="26C6DA"/>
-                </a:solidFill>
-                <a:latin typeface="Hiragino Sans"/>
-              </a:rPr>
-              <a:t>11%</a:t>
-            </a:r>
-          </a:p>
-        </p:txBody>
-      </p:sp>
-      <p:sp>
-        <p:nvSpPr>
-          <p:cNvPr id="11" name="Rectangle 10"/>
-          <p:cNvSpPr/>
-          <p:nvPr/>
-        </p:nvSpPr>
-        <p:spPr>
-          <a:xfrm>
-            <a:off x="662940" y="4343400"/>
-            <a:ext cx="3177540" cy="320040"/>
+            <a:off x="320040" y="2706000"/>
+            <a:ext cx="3474720" cy="21634"/>
           </a:xfrm>
           <a:prstGeom prst="rect">
             <a:avLst/>
@@ -5191,32 +4285,36 @@
           </a:fontRef>
         </p:style>
         <p:txBody>
-          <a:bodyPr rtlCol="0" anchor="ctr"/>
-          <a:lstStyle/>
-          <a:p>
-            <a:pPr algn="ctr"/>
-            <a:r>
-              <a:rPr sz="1300">
-                <a:solidFill>
-                  <a:srgbClr val="FFFFFF"/>
+          <a:bodyPr rtlCol="0" anchor="ctr" wrap="square"/>
+          <a:lstStyle/>
+          <a:p>
+            <a:pPr algn="l">
+              <a:lnSpc>
+                <a:spcPct val="130000"/>
+              </a:lnSpc>
+            </a:pPr>
+            <a:r>
+              <a:rPr sz="1300" b="0">
+                <a:solidFill>
+                  <a:srgbClr val="78716C"/>
                 </a:solidFill>
                 <a:latin typeface="Hiragino Sans"/>
               </a:rPr>
-              <a:t>家族と過ごす時間</a:t>
-            </a:r>
-          </a:p>
-        </p:txBody>
-      </p:sp>
-      <p:sp>
-        <p:nvSpPr>
-          <p:cNvPr id="12" name="Rectangle 11"/>
+              <a:t>個人的変容・成長</a:t>
+            </a:r>
+          </a:p>
+        </p:txBody>
+      </p:sp>
+      <p:sp>
+        <p:nvSpPr>
+          <p:cNvPr id="8" name="Rectangle 7"/>
           <p:cNvSpPr/>
           <p:nvPr/>
         </p:nvSpPr>
         <p:spPr>
           <a:xfrm>
-            <a:off x="274320" y="5029200"/>
-            <a:ext cx="3566160" cy="914400"/>
+            <a:off x="320040" y="3200400"/>
+            <a:ext cx="3474720" cy="53254"/>
           </a:xfrm>
           <a:prstGeom prst="rect">
             <a:avLst/>
@@ -5245,50 +4343,304 @@
           <a:lstStyle/>
           <a:p>
             <a:pPr algn="l">
-              <a:spcAft>
-                <a:spcPts val="400"/>
-              </a:spcAft>
+              <a:lnSpc>
+                <a:spcPct val="130000"/>
+              </a:lnSpc>
             </a:pPr>
             <a:r>
-              <a:rPr sz="1200" b="0">
-                <a:solidFill>
-                  <a:srgbClr val="57534E"/>
+              <a:rPr sz="3200" b="1">
+                <a:solidFill>
+                  <a:srgbClr val="6BD47B"/>
                 </a:solidFill>
                 <a:latin typeface="Hiragino Sans"/>
               </a:rPr>
-              <a:t>メキシコのエンジニア：</a:t>
-            </a:r>
-          </a:p>
+              <a:t>14%</a:t>
+            </a:r>
+          </a:p>
+        </p:txBody>
+      </p:sp>
+      <p:sp>
+        <p:nvSpPr>
+          <p:cNvPr id="9" name="Rectangle 8"/>
+          <p:cNvSpPr/>
+          <p:nvPr/>
+        </p:nvSpPr>
+        <p:spPr>
+          <a:xfrm>
+            <a:off x="320040" y="3620400"/>
+            <a:ext cx="3474720" cy="21634"/>
+          </a:xfrm>
+          <a:prstGeom prst="rect">
+            <a:avLst/>
+          </a:prstGeom>
+          <a:noFill/>
+          <a:ln>
+            <a:noFill/>
+          </a:ln>
+        </p:spPr>
+        <p:style>
+          <a:lnRef idx="1">
+            <a:schemeClr val="accent1"/>
+          </a:lnRef>
+          <a:fillRef idx="3">
+            <a:schemeClr val="accent1"/>
+          </a:fillRef>
+          <a:effectRef idx="2">
+            <a:schemeClr val="accent1"/>
+          </a:effectRef>
+          <a:fontRef idx="minor">
+            <a:schemeClr val="lt1"/>
+          </a:fontRef>
+        </p:style>
+        <p:txBody>
+          <a:bodyPr rtlCol="0" anchor="ctr" wrap="square"/>
+          <a:lstStyle/>
           <a:p>
             <a:pPr algn="l">
-              <a:spcAft>
-                <a:spcPts val="400"/>
-              </a:spcAft>
+              <a:lnSpc>
+                <a:spcPct val="130000"/>
+              </a:lnSpc>
             </a:pPr>
             <a:r>
-              <a:rPr sz="1200" b="0">
-                <a:solidFill>
-                  <a:srgbClr val="57534E"/>
+              <a:rPr sz="1300" b="0">
+                <a:solidFill>
+                  <a:srgbClr val="78716C"/>
                 </a:solidFill>
                 <a:latin typeface="Hiragino Sans"/>
               </a:rPr>
-              <a:t>「AIのおかげで定時に帰れる。</a:t>
-            </a:r>
-          </a:p>
+              <a:t>認知的負担の軽減</a:t>
+            </a:r>
+          </a:p>
+        </p:txBody>
+      </p:sp>
+      <p:sp>
+        <p:nvSpPr>
+          <p:cNvPr id="10" name="Rectangle 9"/>
+          <p:cNvSpPr/>
+          <p:nvPr/>
+        </p:nvSpPr>
+        <p:spPr>
+          <a:xfrm>
+            <a:off x="320040" y="4114800"/>
+            <a:ext cx="3474720" cy="53254"/>
+          </a:xfrm>
+          <a:prstGeom prst="rect">
+            <a:avLst/>
+          </a:prstGeom>
+          <a:noFill/>
+          <a:ln>
+            <a:noFill/>
+          </a:ln>
+        </p:spPr>
+        <p:style>
+          <a:lnRef idx="1">
+            <a:schemeClr val="accent1"/>
+          </a:lnRef>
+          <a:fillRef idx="3">
+            <a:schemeClr val="accent1"/>
+          </a:fillRef>
+          <a:effectRef idx="2">
+            <a:schemeClr val="accent1"/>
+          </a:effectRef>
+          <a:fontRef idx="minor">
+            <a:schemeClr val="lt1"/>
+          </a:fontRef>
+        </p:style>
+        <p:txBody>
+          <a:bodyPr rtlCol="0" anchor="ctr" wrap="square"/>
+          <a:lstStyle/>
           <a:p>
             <a:pPr algn="l">
-              <a:spcAft>
-                <a:spcPts val="400"/>
-              </a:spcAft>
+              <a:lnSpc>
+                <a:spcPct val="130000"/>
+              </a:lnSpc>
             </a:pPr>
             <a:r>
-              <a:rPr sz="1200" b="0">
-                <a:solidFill>
-                  <a:srgbClr val="57534E"/>
+              <a:rPr sz="3200" b="1">
+                <a:solidFill>
+                  <a:srgbClr val="BB86FC"/>
                 </a:solidFill>
                 <a:latin typeface="Hiragino Sans"/>
               </a:rPr>
-              <a:t>  子どもの迎えに行ける」</a:t>
+              <a:t>11%</a:t>
+            </a:r>
+          </a:p>
+        </p:txBody>
+      </p:sp>
+      <p:sp>
+        <p:nvSpPr>
+          <p:cNvPr id="11" name="Rectangle 10"/>
+          <p:cNvSpPr/>
+          <p:nvPr/>
+        </p:nvSpPr>
+        <p:spPr>
+          <a:xfrm>
+            <a:off x="320040" y="4534800"/>
+            <a:ext cx="3474720" cy="21634"/>
+          </a:xfrm>
+          <a:prstGeom prst="rect">
+            <a:avLst/>
+          </a:prstGeom>
+          <a:noFill/>
+          <a:ln>
+            <a:noFill/>
+          </a:ln>
+        </p:spPr>
+        <p:style>
+          <a:lnRef idx="1">
+            <a:schemeClr val="accent1"/>
+          </a:lnRef>
+          <a:fillRef idx="3">
+            <a:schemeClr val="accent1"/>
+          </a:fillRef>
+          <a:effectRef idx="2">
+            <a:schemeClr val="accent1"/>
+          </a:effectRef>
+          <a:fontRef idx="minor">
+            <a:schemeClr val="lt1"/>
+          </a:fontRef>
+        </p:style>
+        <p:txBody>
+          <a:bodyPr rtlCol="0" anchor="ctr" wrap="square"/>
+          <a:lstStyle/>
+          <a:p>
+            <a:pPr algn="l">
+              <a:lnSpc>
+                <a:spcPct val="130000"/>
+              </a:lnSpc>
+            </a:pPr>
+            <a:r>
+              <a:rPr sz="1300" b="0">
+                <a:solidFill>
+                  <a:srgbClr val="78716C"/>
+                </a:solidFill>
+                <a:latin typeface="Hiragino Sans"/>
+              </a:rPr>
+              <a:t>家族と過ごす時間</a:t>
+            </a:r>
+          </a:p>
+        </p:txBody>
+      </p:sp>
+      <p:sp>
+        <p:nvSpPr>
+          <p:cNvPr id="12" name="Rectangle 11"/>
+          <p:cNvSpPr/>
+          <p:nvPr/>
+        </p:nvSpPr>
+        <p:spPr>
+          <a:xfrm>
+            <a:off x="320040" y="5257800"/>
+            <a:ext cx="3474720" cy="46597"/>
+          </a:xfrm>
+          <a:prstGeom prst="rect">
+            <a:avLst/>
+          </a:prstGeom>
+          <a:noFill/>
+          <a:ln>
+            <a:noFill/>
+          </a:ln>
+        </p:spPr>
+        <p:style>
+          <a:lnRef idx="1">
+            <a:schemeClr val="accent1"/>
+          </a:lnRef>
+          <a:fillRef idx="3">
+            <a:schemeClr val="accent1"/>
+          </a:fillRef>
+          <a:effectRef idx="2">
+            <a:schemeClr val="accent1"/>
+          </a:effectRef>
+          <a:fontRef idx="minor">
+            <a:schemeClr val="lt1"/>
+          </a:fontRef>
+        </p:style>
+        <p:txBody>
+          <a:bodyPr rtlCol="0" anchor="ctr" wrap="square"/>
+          <a:lstStyle/>
+          <a:p>
+            <a:pPr algn="l">
+              <a:lnSpc>
+                <a:spcPct val="130000"/>
+              </a:lnSpc>
+            </a:pPr>
+            <a:r>
+              <a:rPr sz="1400" b="1">
+                <a:solidFill>
+                  <a:srgbClr val="C9A02D"/>
+                </a:solidFill>
+                <a:latin typeface="Hiragino Sans"/>
+              </a:rPr>
+              <a:t>「生産性」と答えたのに、</a:t>
+            </a:r>
+          </a:p>
+          <a:p>
+            <a:pPr algn="l">
+              <a:lnSpc>
+                <a:spcPct val="130000"/>
+              </a:lnSpc>
+            </a:pPr>
+            <a:r>
+              <a:rPr sz="1400" b="1">
+                <a:solidFill>
+                  <a:srgbClr val="C9A02D"/>
+                </a:solidFill>
+                <a:latin typeface="Hiragino Sans"/>
+              </a:rPr>
+              <a:t>中身は全部「自由」だった</a:t>
+            </a:r>
+          </a:p>
+        </p:txBody>
+      </p:sp>
+      <p:sp>
+        <p:nvSpPr>
+          <p:cNvPr id="13" name="Rectangle 12"/>
+          <p:cNvSpPr/>
+          <p:nvPr/>
+        </p:nvSpPr>
+        <p:spPr>
+          <a:xfrm>
+            <a:off x="320040" y="6720000"/>
+            <a:ext cx="3474720" cy="14977"/>
+          </a:xfrm>
+          <a:prstGeom prst="rect">
+            <a:avLst/>
+          </a:prstGeom>
+          <a:noFill/>
+          <a:ln>
+            <a:noFill/>
+          </a:ln>
+        </p:spPr>
+        <p:style>
+          <a:lnRef idx="1">
+            <a:schemeClr val="accent1"/>
+          </a:lnRef>
+          <a:fillRef idx="3">
+            <a:schemeClr val="accent1"/>
+          </a:fillRef>
+          <a:effectRef idx="2">
+            <a:schemeClr val="accent1"/>
+          </a:effectRef>
+          <a:fontRef idx="minor">
+            <a:schemeClr val="lt1"/>
+          </a:fontRef>
+        </p:style>
+        <p:txBody>
+          <a:bodyPr rtlCol="0" anchor="ctr" wrap="square"/>
+          <a:lstStyle/>
+          <a:p>
+            <a:pPr algn="l">
+              <a:lnSpc>
+                <a:spcPct val="130000"/>
+              </a:lnSpc>
+            </a:pPr>
+            <a:r>
+              <a:rPr sz="900" b="0">
+                <a:solidFill>
+                  <a:srgbClr val="C9A02D"/>
+                </a:solidFill>
+                <a:latin typeface="Hiragino Sans"/>
+              </a:rPr>
+              <a:t>HARMONIC insight</a:t>
             </a:r>
           </a:p>
         </p:txBody>
@@ -5307,7 +4659,7 @@
     <p:bg>
       <p:bgPr>
         <a:solidFill>
-          <a:srgbClr val="1C1917"/>
+          <a:srgbClr val="12100E"/>
         </a:solidFill>
         <a:effectLst/>
       </p:bgPr>
@@ -5327,14 +4679,14 @@
         </p:nvSpPr>
         <p:spPr>
           <a:xfrm>
-            <a:off x="0" y="0"/>
-            <a:ext cx="4114800" cy="54864"/>
+            <a:off x="0" y="1143000"/>
+            <a:ext cx="36576" cy="2743200"/>
           </a:xfrm>
           <a:prstGeom prst="rect">
             <a:avLst/>
           </a:prstGeom>
           <a:solidFill>
-            <a:srgbClr val="B8942F"/>
+            <a:srgbClr val="C9A02D"/>
           </a:solidFill>
           <a:ln>
             <a:noFill/>
@@ -5370,8 +4722,8 @@
         </p:nvSpPr>
         <p:spPr>
           <a:xfrm>
-            <a:off x="274320" y="6675120"/>
-            <a:ext cx="3566160" cy="365760"/>
+            <a:off x="320040" y="1143000"/>
+            <a:ext cx="3474720" cy="46597"/>
           </a:xfrm>
           <a:prstGeom prst="rect">
             <a:avLst/>
@@ -5399,15 +4751,35 @@
           <a:bodyPr rtlCol="0" anchor="ctr" wrap="square"/>
           <a:lstStyle/>
           <a:p>
-            <a:pPr algn="l"/>
-            <a:r>
-              <a:rPr sz="900">
-                <a:solidFill>
-                  <a:srgbClr val="B8942F"/>
+            <a:pPr algn="l">
+              <a:lnSpc>
+                <a:spcPct val="130000"/>
+              </a:lnSpc>
+            </a:pPr>
+            <a:r>
+              <a:rPr sz="1400" b="0">
+                <a:solidFill>
+                  <a:srgbClr val="78716C"/>
                 </a:solidFill>
                 <a:latin typeface="Hiragino Sans"/>
               </a:rPr>
-              <a:t>HARMONIC insight</a:t>
+              <a:t>レポートに登場する</a:t>
+            </a:r>
+          </a:p>
+          <a:p>
+            <a:pPr algn="l">
+              <a:lnSpc>
+                <a:spcPct val="130000"/>
+              </a:lnSpc>
+            </a:pPr>
+            <a:r>
+              <a:rPr sz="1400" b="0">
+                <a:solidFill>
+                  <a:srgbClr val="78716C"/>
+                </a:solidFill>
+                <a:latin typeface="Hiragino Sans"/>
+              </a:rPr>
+              <a:t>メキシコのエンジニア</a:t>
             </a:r>
           </a:p>
         </p:txBody>
@@ -5420,8 +4792,8 @@
         </p:nvSpPr>
         <p:spPr>
           <a:xfrm>
-            <a:off x="274320" y="1371600"/>
-            <a:ext cx="3566160" cy="1600200"/>
+            <a:off x="320040" y="1828800"/>
+            <a:ext cx="3474720" cy="79881"/>
           </a:xfrm>
           <a:prstGeom prst="rect">
             <a:avLst/>
@@ -5450,50 +4822,34 @@
           <a:lstStyle/>
           <a:p>
             <a:pPr algn="l">
-              <a:spcAft>
-                <a:spcPts val="400"/>
-              </a:spcAft>
+              <a:lnSpc>
+                <a:spcPct val="130000"/>
+              </a:lnSpc>
             </a:pPr>
             <a:r>
-              <a:rPr sz="2800" b="1">
-                <a:solidFill>
-                  <a:srgbClr val="FFFFFF"/>
+              <a:rPr sz="2400" b="1">
+                <a:solidFill>
+                  <a:srgbClr val="F5F0EB"/>
                 </a:solidFill>
                 <a:latin typeface="Hiragino Sans"/>
               </a:rPr>
-              <a:t>人は</a:t>
+              <a:t>「AIのおかげで</a:t>
             </a:r>
           </a:p>
           <a:p>
             <a:pPr algn="l">
-              <a:spcAft>
-                <a:spcPts val="400"/>
-              </a:spcAft>
+              <a:lnSpc>
+                <a:spcPct val="130000"/>
+              </a:lnSpc>
             </a:pPr>
             <a:r>
-              <a:rPr sz="2800" b="1">
-                <a:solidFill>
-                  <a:srgbClr val="FFFFFF"/>
+              <a:rPr sz="2400" b="1">
+                <a:solidFill>
+                  <a:srgbClr val="F5F0EB"/>
                 </a:solidFill>
                 <a:latin typeface="Hiragino Sans"/>
               </a:rPr>
-              <a:t>「生産性」と</a:t>
-            </a:r>
-          </a:p>
-          <a:p>
-            <a:pPr algn="l">
-              <a:spcAft>
-                <a:spcPts val="400"/>
-              </a:spcAft>
-            </a:pPr>
-            <a:r>
-              <a:rPr sz="2800" b="1">
-                <a:solidFill>
-                  <a:srgbClr val="FFFFFF"/>
-                </a:solidFill>
-                <a:latin typeface="Hiragino Sans"/>
-              </a:rPr>
-              <a:t>答えた</a:t>
+              <a:t>  定時に帰れる。</a:t>
             </a:r>
           </a:p>
         </p:txBody>
@@ -5506,51 +4862,8 @@
         </p:nvSpPr>
         <p:spPr>
           <a:xfrm>
-            <a:off x="274320" y="3200400"/>
-            <a:ext cx="3566160" cy="18288"/>
-          </a:xfrm>
-          <a:prstGeom prst="rect">
-            <a:avLst/>
-          </a:prstGeom>
-          <a:solidFill>
-            <a:srgbClr val="B8942F"/>
-          </a:solidFill>
-          <a:ln>
-            <a:noFill/>
-          </a:ln>
-        </p:spPr>
-        <p:style>
-          <a:lnRef idx="1">
-            <a:schemeClr val="accent1"/>
-          </a:lnRef>
-          <a:fillRef idx="3">
-            <a:schemeClr val="accent1"/>
-          </a:fillRef>
-          <a:effectRef idx="2">
-            <a:schemeClr val="accent1"/>
-          </a:effectRef>
-          <a:fontRef idx="minor">
-            <a:schemeClr val="lt1"/>
-          </a:fontRef>
-        </p:style>
-        <p:txBody>
-          <a:bodyPr rtlCol="0" anchor="ctr"/>
-          <a:lstStyle/>
-          <a:p>
-            <a:pPr algn="ctr"/>
-          </a:p>
-        </p:txBody>
-      </p:sp>
-      <p:sp>
-        <p:nvSpPr>
-          <p:cNvPr id="6" name="Rectangle 5"/>
-          <p:cNvSpPr/>
-          <p:nvPr/>
-        </p:nvSpPr>
-        <p:spPr>
-          <a:xfrm>
-            <a:off x="274320" y="3429000"/>
-            <a:ext cx="3566160" cy="1600200"/>
+            <a:off x="320040" y="2743200"/>
+            <a:ext cx="3474720" cy="119822"/>
           </a:xfrm>
           <a:prstGeom prst="rect">
             <a:avLst/>
@@ -5579,50 +4892,233 @@
           <a:lstStyle/>
           <a:p>
             <a:pPr algn="l">
-              <a:spcAft>
-                <a:spcPts val="400"/>
-              </a:spcAft>
+              <a:lnSpc>
+                <a:spcPct val="130000"/>
+              </a:lnSpc>
             </a:pPr>
             <a:r>
-              <a:rPr sz="2800" b="1">
-                <a:solidFill>
-                  <a:srgbClr val="B8942F"/>
+              <a:rPr sz="2400" b="1">
+                <a:solidFill>
+                  <a:srgbClr val="C9A02D"/>
                 </a:solidFill>
                 <a:latin typeface="Hiragino Sans"/>
               </a:rPr>
-              <a:t>本当に</a:t>
+              <a:t>  子どもの迎えに</a:t>
             </a:r>
           </a:p>
           <a:p>
             <a:pPr algn="l">
-              <a:spcAft>
-                <a:spcPts val="400"/>
-              </a:spcAft>
+              <a:lnSpc>
+                <a:spcPct val="130000"/>
+              </a:lnSpc>
             </a:pPr>
             <a:r>
-              <a:rPr sz="2800" b="1">
-                <a:solidFill>
-                  <a:srgbClr val="B8942F"/>
+              <a:rPr sz="2400" b="1">
+                <a:solidFill>
+                  <a:srgbClr val="C9A02D"/>
                 </a:solidFill>
                 <a:latin typeface="Hiragino Sans"/>
               </a:rPr>
-              <a:t>求めていたのは</a:t>
+              <a:t>  行けるように</a:t>
             </a:r>
           </a:p>
           <a:p>
             <a:pPr algn="l">
-              <a:spcAft>
-                <a:spcPts val="400"/>
-              </a:spcAft>
+              <a:lnSpc>
+                <a:spcPct val="130000"/>
+              </a:lnSpc>
             </a:pPr>
             <a:r>
-              <a:rPr sz="2800" b="1">
-                <a:solidFill>
-                  <a:srgbClr val="B8942F"/>
+              <a:rPr sz="2400" b="1">
+                <a:solidFill>
+                  <a:srgbClr val="C9A02D"/>
                 </a:solidFill>
                 <a:latin typeface="Hiragino Sans"/>
               </a:rPr>
-              <a:t>「自由」だった</a:t>
+              <a:t>  なった」</a:t>
+            </a:r>
+          </a:p>
+        </p:txBody>
+      </p:sp>
+      <p:sp>
+        <p:nvSpPr>
+          <p:cNvPr id="6" name="Rectangle 5"/>
+          <p:cNvSpPr/>
+          <p:nvPr/>
+        </p:nvSpPr>
+        <p:spPr>
+          <a:xfrm>
+            <a:off x="320040" y="4343400"/>
+            <a:ext cx="914400" cy="13716"/>
+          </a:xfrm>
+          <a:prstGeom prst="rect">
+            <a:avLst/>
+          </a:prstGeom>
+          <a:solidFill>
+            <a:srgbClr val="C9A02D"/>
+          </a:solidFill>
+          <a:ln>
+            <a:noFill/>
+          </a:ln>
+        </p:spPr>
+        <p:style>
+          <a:lnRef idx="1">
+            <a:schemeClr val="accent1"/>
+          </a:lnRef>
+          <a:fillRef idx="3">
+            <a:schemeClr val="accent1"/>
+          </a:fillRef>
+          <a:effectRef idx="2">
+            <a:schemeClr val="accent1"/>
+          </a:effectRef>
+          <a:fontRef idx="minor">
+            <a:schemeClr val="lt1"/>
+          </a:fontRef>
+        </p:style>
+        <p:txBody>
+          <a:bodyPr rtlCol="0" anchor="ctr"/>
+          <a:lstStyle/>
+          <a:p>
+            <a:pPr algn="ctr"/>
+          </a:p>
+        </p:txBody>
+      </p:sp>
+      <p:sp>
+        <p:nvSpPr>
+          <p:cNvPr id="7" name="Rectangle 6"/>
+          <p:cNvSpPr/>
+          <p:nvPr/>
+        </p:nvSpPr>
+        <p:spPr>
+          <a:xfrm>
+            <a:off x="320040" y="4571040"/>
+            <a:ext cx="3474720" cy="64904"/>
+          </a:xfrm>
+          <a:prstGeom prst="rect">
+            <a:avLst/>
+          </a:prstGeom>
+          <a:noFill/>
+          <a:ln>
+            <a:noFill/>
+          </a:ln>
+        </p:spPr>
+        <p:style>
+          <a:lnRef idx="1">
+            <a:schemeClr val="accent1"/>
+          </a:lnRef>
+          <a:fillRef idx="3">
+            <a:schemeClr val="accent1"/>
+          </a:fillRef>
+          <a:effectRef idx="2">
+            <a:schemeClr val="accent1"/>
+          </a:effectRef>
+          <a:fontRef idx="minor">
+            <a:schemeClr val="lt1"/>
+          </a:fontRef>
+        </p:style>
+        <p:txBody>
+          <a:bodyPr rtlCol="0" anchor="ctr" wrap="square"/>
+          <a:lstStyle/>
+          <a:p>
+            <a:pPr algn="l">
+              <a:lnSpc>
+                <a:spcPct val="130000"/>
+              </a:lnSpc>
+            </a:pPr>
+            <a:r>
+              <a:rPr sz="1300" b="0">
+                <a:solidFill>
+                  <a:srgbClr val="78716C"/>
+                </a:solidFill>
+                <a:latin typeface="Hiragino Sans"/>
+              </a:rPr>
+              <a:t>世界中で同じ声が上がっている。</a:t>
+            </a:r>
+          </a:p>
+          <a:p>
+            <a:pPr algn="l">
+              <a:lnSpc>
+                <a:spcPct val="130000"/>
+              </a:lnSpc>
+            </a:pPr>
+            <a:r>
+              <a:rPr sz="1300" b="0">
+                <a:solidFill>
+                  <a:srgbClr val="78716C"/>
+                </a:solidFill>
+                <a:latin typeface="Hiragino Sans"/>
+              </a:rPr>
+              <a:t>AIの価値は「速さ」ではなく</a:t>
+            </a:r>
+          </a:p>
+          <a:p>
+            <a:pPr algn="l">
+              <a:lnSpc>
+                <a:spcPct val="130000"/>
+              </a:lnSpc>
+            </a:pPr>
+            <a:r>
+              <a:rPr sz="1300" b="0">
+                <a:solidFill>
+                  <a:srgbClr val="78716C"/>
+                </a:solidFill>
+                <a:latin typeface="Hiragino Sans"/>
+              </a:rPr>
+              <a:t>「人生の時間を取り戻すこと」</a:t>
+            </a:r>
+          </a:p>
+        </p:txBody>
+      </p:sp>
+      <p:sp>
+        <p:nvSpPr>
+          <p:cNvPr id="8" name="Rectangle 7"/>
+          <p:cNvSpPr/>
+          <p:nvPr/>
+        </p:nvSpPr>
+        <p:spPr>
+          <a:xfrm>
+            <a:off x="320040" y="6720000"/>
+            <a:ext cx="3474720" cy="14977"/>
+          </a:xfrm>
+          <a:prstGeom prst="rect">
+            <a:avLst/>
+          </a:prstGeom>
+          <a:noFill/>
+          <a:ln>
+            <a:noFill/>
+          </a:ln>
+        </p:spPr>
+        <p:style>
+          <a:lnRef idx="1">
+            <a:schemeClr val="accent1"/>
+          </a:lnRef>
+          <a:fillRef idx="3">
+            <a:schemeClr val="accent1"/>
+          </a:fillRef>
+          <a:effectRef idx="2">
+            <a:schemeClr val="accent1"/>
+          </a:effectRef>
+          <a:fontRef idx="minor">
+            <a:schemeClr val="lt1"/>
+          </a:fontRef>
+        </p:style>
+        <p:txBody>
+          <a:bodyPr rtlCol="0" anchor="ctr" wrap="square"/>
+          <a:lstStyle/>
+          <a:p>
+            <a:pPr algn="l">
+              <a:lnSpc>
+                <a:spcPct val="130000"/>
+              </a:lnSpc>
+            </a:pPr>
+            <a:r>
+              <a:rPr sz="900" b="0">
+                <a:solidFill>
+                  <a:srgbClr val="C9A02D"/>
+                </a:solidFill>
+                <a:latin typeface="Hiragino Sans"/>
+              </a:rPr>
+              <a:t>HARMONIC insight</a:t>
             </a:r>
           </a:p>
         </p:txBody>
@@ -5641,7 +5137,7 @@
     <p:bg>
       <p:bgPr>
         <a:solidFill>
-          <a:srgbClr val="1C1917"/>
+          <a:srgbClr val="12100E"/>
         </a:solidFill>
         <a:effectLst/>
       </p:bgPr>
@@ -5661,51 +5157,8 @@
         </p:nvSpPr>
         <p:spPr>
           <a:xfrm>
-            <a:off x="0" y="0"/>
-            <a:ext cx="4114800" cy="54864"/>
-          </a:xfrm>
-          <a:prstGeom prst="rect">
-            <a:avLst/>
-          </a:prstGeom>
-          <a:solidFill>
-            <a:srgbClr val="B8942F"/>
-          </a:solidFill>
-          <a:ln>
-            <a:noFill/>
-          </a:ln>
-        </p:spPr>
-        <p:style>
-          <a:lnRef idx="1">
-            <a:schemeClr val="accent1"/>
-          </a:lnRef>
-          <a:fillRef idx="3">
-            <a:schemeClr val="accent1"/>
-          </a:fillRef>
-          <a:effectRef idx="2">
-            <a:schemeClr val="accent1"/>
-          </a:effectRef>
-          <a:fontRef idx="minor">
-            <a:schemeClr val="lt1"/>
-          </a:fontRef>
-        </p:style>
-        <p:txBody>
-          <a:bodyPr rtlCol="0" anchor="ctr"/>
-          <a:lstStyle/>
-          <a:p>
-            <a:pPr algn="ctr"/>
-          </a:p>
-        </p:txBody>
-      </p:sp>
-      <p:sp>
-        <p:nvSpPr>
-          <p:cNvPr id="3" name="Rectangle 2"/>
-          <p:cNvSpPr/>
-          <p:nvPr/>
-        </p:nvSpPr>
-        <p:spPr>
-          <a:xfrm>
-            <a:off x="274320" y="6675120"/>
-            <a:ext cx="3566160" cy="365760"/>
+            <a:off x="320040" y="1828800"/>
+            <a:ext cx="3474720" cy="106509"/>
           </a:xfrm>
           <a:prstGeom prst="rect">
             <a:avLst/>
@@ -5733,29 +5186,49 @@
           <a:bodyPr rtlCol="0" anchor="ctr" wrap="square"/>
           <a:lstStyle/>
           <a:p>
-            <a:pPr algn="l"/>
-            <a:r>
-              <a:rPr sz="900">
-                <a:solidFill>
-                  <a:srgbClr val="B8942F"/>
+            <a:pPr algn="l">
+              <a:lnSpc>
+                <a:spcPct val="130000"/>
+              </a:lnSpc>
+            </a:pPr>
+            <a:r>
+              <a:rPr sz="3200" b="1">
+                <a:solidFill>
+                  <a:srgbClr val="F5F0EB"/>
                 </a:solidFill>
                 <a:latin typeface="Hiragino Sans"/>
               </a:rPr>
-              <a:t>HARMONIC insight</a:t>
-            </a:r>
-          </a:p>
-        </p:txBody>
-      </p:sp>
-      <p:sp>
-        <p:nvSpPr>
-          <p:cNvPr id="4" name="Rectangle 3"/>
+              <a:t>生産性は</a:t>
+            </a:r>
+          </a:p>
+          <a:p>
+            <a:pPr algn="l">
+              <a:lnSpc>
+                <a:spcPct val="130000"/>
+              </a:lnSpc>
+            </a:pPr>
+            <a:r>
+              <a:rPr sz="3200" b="1">
+                <a:solidFill>
+                  <a:srgbClr val="F5F0EB"/>
+                </a:solidFill>
+                <a:latin typeface="Hiragino Sans"/>
+              </a:rPr>
+              <a:t>手段。</a:t>
+            </a:r>
+          </a:p>
+        </p:txBody>
+      </p:sp>
+      <p:sp>
+        <p:nvSpPr>
+          <p:cNvPr id="3" name="Rectangle 2"/>
           <p:cNvSpPr/>
           <p:nvPr/>
         </p:nvSpPr>
         <p:spPr>
           <a:xfrm>
-            <a:off x="274320" y="2057400"/>
-            <a:ext cx="3566160" cy="2286000"/>
+            <a:off x="320040" y="3200400"/>
+            <a:ext cx="3474720" cy="159763"/>
           </a:xfrm>
           <a:prstGeom prst="rect">
             <a:avLst/>
@@ -5784,30 +5257,14 @@
           <a:lstStyle/>
           <a:p>
             <a:pPr algn="l">
-              <a:spcAft>
-                <a:spcPts val="400"/>
-              </a:spcAft>
+              <a:lnSpc>
+                <a:spcPct val="130000"/>
+              </a:lnSpc>
             </a:pPr>
             <a:r>
-              <a:rPr sz="2800" b="1">
-                <a:solidFill>
-                  <a:srgbClr val="FFFFFF"/>
-                </a:solidFill>
-                <a:latin typeface="Hiragino Sans"/>
-              </a:rPr>
-              <a:t>生産性は手段。</a:t>
-            </a:r>
-          </a:p>
-          <a:p>
-            <a:pPr algn="l">
-              <a:spcAft>
-                <a:spcPts val="400"/>
-              </a:spcAft>
-            </a:pPr>
-            <a:r>
-              <a:rPr sz="2800" b="1">
-                <a:solidFill>
-                  <a:srgbClr val="FFFFFF"/>
+              <a:rPr sz="3200" b="1">
+                <a:solidFill>
+                  <a:srgbClr val="C9A02D"/>
                 </a:solidFill>
                 <a:latin typeface="Hiragino Sans"/>
               </a:rPr>
@@ -5816,48 +5273,48 @@
           </a:p>
           <a:p>
             <a:pPr algn="l">
-              <a:spcAft>
-                <a:spcPts val="400"/>
-              </a:spcAft>
+              <a:lnSpc>
+                <a:spcPct val="130000"/>
+              </a:lnSpc>
             </a:pPr>
             <a:r>
-              <a:rPr sz="2800" b="1">
-                <a:solidFill>
-                  <a:srgbClr val="FFFFFF"/>
+              <a:rPr sz="3200" b="1">
+                <a:solidFill>
+                  <a:srgbClr val="C9A02D"/>
                 </a:solidFill>
                 <a:latin typeface="Hiragino Sans"/>
               </a:rPr>
-              <a:t>人生を取り戻す</a:t>
+              <a:t>人生を</a:t>
             </a:r>
           </a:p>
           <a:p>
             <a:pPr algn="l">
-              <a:spcAft>
-                <a:spcPts val="400"/>
-              </a:spcAft>
+              <a:lnSpc>
+                <a:spcPct val="130000"/>
+              </a:lnSpc>
             </a:pPr>
             <a:r>
-              <a:rPr sz="2800" b="1">
-                <a:solidFill>
-                  <a:srgbClr val="FFFFFF"/>
+              <a:rPr sz="3200" b="1">
+                <a:solidFill>
+                  <a:srgbClr val="C9A02D"/>
                 </a:solidFill>
                 <a:latin typeface="Hiragino Sans"/>
               </a:rPr>
-              <a:t>こと。</a:t>
-            </a:r>
-          </a:p>
-        </p:txBody>
-      </p:sp>
-      <p:sp>
-        <p:nvSpPr>
-          <p:cNvPr id="5" name="Rectangle 4"/>
+              <a:t>取り戻すこと。</a:t>
+            </a:r>
+          </a:p>
+        </p:txBody>
+      </p:sp>
+      <p:sp>
+        <p:nvSpPr>
+          <p:cNvPr id="4" name="Rectangle 3"/>
           <p:cNvSpPr/>
           <p:nvPr/>
         </p:nvSpPr>
         <p:spPr>
           <a:xfrm>
-            <a:off x="274320" y="5486400"/>
-            <a:ext cx="3566160" cy="457200"/>
+            <a:off x="320040" y="6172200"/>
+            <a:ext cx="3474720" cy="13313"/>
           </a:xfrm>
           <a:prstGeom prst="rect">
             <a:avLst/>
@@ -5886,18 +5343,72 @@
           <a:lstStyle/>
           <a:p>
             <a:pPr algn="l">
-              <a:spcAft>
-                <a:spcPts val="400"/>
-              </a:spcAft>
+              <a:lnSpc>
+                <a:spcPct val="130000"/>
+              </a:lnSpc>
             </a:pPr>
             <a:r>
-              <a:rPr sz="900" b="0">
-                <a:solidFill>
-                  <a:srgbClr val="57534E"/>
+              <a:rPr sz="800" b="0">
+                <a:solidFill>
+                  <a:srgbClr val="4A4540"/>
                 </a:solidFill>
                 <a:latin typeface="Hiragino Sans"/>
               </a:rPr>
-              <a:t>出典: Anthropic "81,000 Interviews" 2026</a:t>
+              <a:t>Anthropic "81,000 Interviews" 2026年3月18日</a:t>
+            </a:r>
+          </a:p>
+        </p:txBody>
+      </p:sp>
+      <p:sp>
+        <p:nvSpPr>
+          <p:cNvPr id="5" name="Rectangle 4"/>
+          <p:cNvSpPr/>
+          <p:nvPr/>
+        </p:nvSpPr>
+        <p:spPr>
+          <a:xfrm>
+            <a:off x="320040" y="6720000"/>
+            <a:ext cx="3474720" cy="14977"/>
+          </a:xfrm>
+          <a:prstGeom prst="rect">
+            <a:avLst/>
+          </a:prstGeom>
+          <a:noFill/>
+          <a:ln>
+            <a:noFill/>
+          </a:ln>
+        </p:spPr>
+        <p:style>
+          <a:lnRef idx="1">
+            <a:schemeClr val="accent1"/>
+          </a:lnRef>
+          <a:fillRef idx="3">
+            <a:schemeClr val="accent1"/>
+          </a:fillRef>
+          <a:effectRef idx="2">
+            <a:schemeClr val="accent1"/>
+          </a:effectRef>
+          <a:fontRef idx="minor">
+            <a:schemeClr val="lt1"/>
+          </a:fontRef>
+        </p:style>
+        <p:txBody>
+          <a:bodyPr rtlCol="0" anchor="ctr" wrap="square"/>
+          <a:lstStyle/>
+          <a:p>
+            <a:pPr algn="l">
+              <a:lnSpc>
+                <a:spcPct val="130000"/>
+              </a:lnSpc>
+            </a:pPr>
+            <a:r>
+              <a:rPr sz="900" b="0">
+                <a:solidFill>
+                  <a:srgbClr val="C9A02D"/>
+                </a:solidFill>
+                <a:latin typeface="Hiragino Sans"/>
+              </a:rPr>
+              <a:t>HARMONIC insight</a:t>
             </a:r>
           </a:p>
         </p:txBody>

--- a/content/youtube/shorts/SHORT_NEWS_01_anthropic_freedom.pptx
+++ b/content/youtube/shorts/SHORT_NEWS_01_anthropic_freedom.pptx
@@ -3088,7 +3088,7 @@
     <p:bg>
       <p:bgPr>
         <a:solidFill>
-          <a:srgbClr val="12100E"/>
+          <a:srgbClr val="FAF8F5"/>
         </a:solidFill>
         <a:effectLst/>
       </p:bgPr>
@@ -3108,8 +3108,8 @@
         </p:nvSpPr>
         <p:spPr>
           <a:xfrm>
-            <a:off x="320040" y="457200"/>
-            <a:ext cx="1645920" cy="274320"/>
+            <a:off x="365760" y="548640"/>
+            <a:ext cx="1737360" cy="274320"/>
           </a:xfrm>
           <a:prstGeom prst="roundRect">
             <a:avLst>
@@ -3117,7 +3117,7 @@
             </a:avLst>
           </a:prstGeom>
           <a:solidFill>
-            <a:srgbClr val="E84D3D"/>
+            <a:srgbClr val="B5453A"/>
           </a:solidFill>
           <a:ln>
             <a:noFill/>
@@ -3138,14 +3138,14 @@
           </a:fontRef>
         </p:style>
         <p:txBody>
-          <a:bodyPr rtlCol="0" anchor="ctr" wrap="none"/>
+          <a:bodyPr rtlCol="0" anchor="ctr"/>
           <a:lstStyle/>
           <a:p>
             <a:pPr algn="ctr"/>
             <a:r>
-              <a:rPr sz="1100" b="1">
-                <a:solidFill>
-                  <a:srgbClr val="F5F0EB"/>
+              <a:rPr sz="1000" b="1">
+                <a:solidFill>
+                  <a:srgbClr val="FFFFFF"/>
                 </a:solidFill>
                 <a:latin typeface="Hiragino Sans"/>
               </a:rPr>
@@ -3162,8 +3162,8 @@
         </p:nvSpPr>
         <p:spPr>
           <a:xfrm>
-            <a:off x="320040" y="1143000"/>
-            <a:ext cx="3474720" cy="49926"/>
+            <a:off x="365760" y="1371600"/>
+            <a:ext cx="3383280" cy="49926"/>
           </a:xfrm>
           <a:prstGeom prst="rect">
             <a:avLst/>
@@ -3197,9 +3197,9 @@
               </a:lnSpc>
             </a:pPr>
             <a:r>
-              <a:rPr sz="3000" b="1">
-                <a:solidFill>
-                  <a:srgbClr val="F5F0EB"/>
+              <a:rPr sz="2800" b="1">
+                <a:solidFill>
+                  <a:srgbClr val="1C1917"/>
                 </a:solidFill>
                 <a:latin typeface="Hiragino Sans"/>
               </a:rPr>
@@ -3216,8 +3216,8 @@
         </p:nvSpPr>
         <p:spPr>
           <a:xfrm>
-            <a:off x="320040" y="1828800"/>
-            <a:ext cx="3474720" cy="149778"/>
+            <a:off x="365760" y="2057400"/>
+            <a:ext cx="3383280" cy="160477"/>
           </a:xfrm>
           <a:prstGeom prst="rect">
             <a:avLst/>
@@ -3253,7 +3253,7 @@
             <a:r>
               <a:rPr sz="3000" b="1">
                 <a:solidFill>
-                  <a:srgbClr val="C9A02D"/>
+                  <a:srgbClr val="B8942F"/>
                 </a:solidFill>
                 <a:latin typeface="Hiragino Sans"/>
               </a:rPr>
@@ -3269,7 +3269,7 @@
             <a:r>
               <a:rPr sz="3000" b="1">
                 <a:solidFill>
-                  <a:srgbClr val="C9A02D"/>
+                  <a:srgbClr val="B8942F"/>
                 </a:solidFill>
                 <a:latin typeface="Hiragino Sans"/>
               </a:rPr>
@@ -3285,7 +3285,7 @@
             <a:r>
               <a:rPr sz="3000" b="1">
                 <a:solidFill>
-                  <a:srgbClr val="C9A02D"/>
+                  <a:srgbClr val="B8942F"/>
                 </a:solidFill>
                 <a:latin typeface="Hiragino Sans"/>
               </a:rPr>
@@ -3302,14 +3302,14 @@
         </p:nvSpPr>
         <p:spPr>
           <a:xfrm>
-            <a:off x="320040" y="3886200"/>
+            <a:off x="365760" y="4114800"/>
             <a:ext cx="914400" cy="13716"/>
           </a:xfrm>
           <a:prstGeom prst="rect">
             <a:avLst/>
           </a:prstGeom>
           <a:solidFill>
-            <a:srgbClr val="C9A02D"/>
+            <a:srgbClr val="B8942F"/>
           </a:solidFill>
           <a:ln>
             <a:noFill/>
@@ -3345,8 +3345,8 @@
         </p:nvSpPr>
         <p:spPr>
           <a:xfrm>
-            <a:off x="320040" y="4114800"/>
-            <a:ext cx="3474720" cy="39940"/>
+            <a:off x="365760" y="4343400"/>
+            <a:ext cx="3383280" cy="39227"/>
           </a:xfrm>
           <a:prstGeom prst="rect">
             <a:avLst/>
@@ -3380,13 +3380,13 @@
               </a:lnSpc>
             </a:pPr>
             <a:r>
-              <a:rPr sz="1200" b="0">
-                <a:solidFill>
-                  <a:srgbClr val="78716C"/>
+              <a:rPr sz="1100" b="0">
+                <a:solidFill>
+                  <a:srgbClr val="7A6652"/>
                 </a:solidFill>
                 <a:latin typeface="Hiragino Sans"/>
               </a:rPr>
-              <a:t>世界159か国・70言語、</a:t>
+              <a:t>世界159か国・70言語。</a:t>
             </a:r>
           </a:p>
           <a:p>
@@ -3396,13 +3396,13 @@
               </a:lnSpc>
             </a:pPr>
             <a:r>
-              <a:rPr sz="1200" b="0">
-                <a:solidFill>
-                  <a:srgbClr val="78716C"/>
+              <a:rPr sz="1100" b="0">
+                <a:solidFill>
+                  <a:srgbClr val="7A6652"/>
                 </a:solidFill>
                 <a:latin typeface="Hiragino Sans"/>
               </a:rPr>
-              <a:t>AI分野で史上最大の調査</a:t>
+              <a:t>AI分野で史上最大の調査レポート</a:t>
             </a:r>
           </a:p>
         </p:txBody>
@@ -3415,8 +3415,8 @@
         </p:nvSpPr>
         <p:spPr>
           <a:xfrm>
-            <a:off x="320040" y="6720000"/>
-            <a:ext cx="3474720" cy="14977"/>
+            <a:off x="365760" y="6720000"/>
+            <a:ext cx="3383280" cy="16047"/>
           </a:xfrm>
           <a:prstGeom prst="rect">
             <a:avLst/>
@@ -3452,7 +3452,7 @@
             <a:r>
               <a:rPr sz="900" b="0">
                 <a:solidFill>
-                  <a:srgbClr val="C9A02D"/>
+                  <a:srgbClr val="B8942F"/>
                 </a:solidFill>
                 <a:latin typeface="Hiragino Sans"/>
               </a:rPr>
@@ -3475,7 +3475,7 @@
     <p:bg>
       <p:bgPr>
         <a:solidFill>
-          <a:srgbClr val="12100E"/>
+          <a:srgbClr val="FAF8F5"/>
         </a:solidFill>
         <a:effectLst/>
       </p:bgPr>
@@ -3496,13 +3496,13 @@
         <p:spPr>
           <a:xfrm>
             <a:off x="0" y="457200"/>
-            <a:ext cx="36576" cy="6400000"/>
+            <a:ext cx="32000" cy="5943600"/>
           </a:xfrm>
           <a:prstGeom prst="rect">
             <a:avLst/>
           </a:prstGeom>
           <a:solidFill>
-            <a:srgbClr val="C9A02D"/>
+            <a:srgbClr val="B8942F"/>
           </a:solidFill>
           <a:ln>
             <a:noFill/>
@@ -3538,8 +3538,8 @@
         </p:nvSpPr>
         <p:spPr>
           <a:xfrm>
-            <a:off x="320040" y="640080"/>
-            <a:ext cx="3474720" cy="109837"/>
+            <a:off x="365760" y="640080"/>
+            <a:ext cx="3383280" cy="49926"/>
           </a:xfrm>
           <a:prstGeom prst="rect">
             <a:avLst/>
@@ -3573,13 +3573,13 @@
               </a:lnSpc>
             </a:pPr>
             <a:r>
-              <a:rPr sz="2200" b="0">
-                <a:solidFill>
-                  <a:srgbClr val="78716C"/>
+              <a:rPr sz="1400" b="0">
+                <a:solidFill>
+                  <a:srgbClr val="7A6652"/>
                 </a:solidFill>
                 <a:latin typeface="Hiragino Sans"/>
               </a:rPr>
-              <a:t>Anthropicの</a:t>
+              <a:t>Anthropic社が発表した</a:t>
             </a:r>
           </a:p>
           <a:p>
@@ -3589,29 +3589,13 @@
               </a:lnSpc>
             </a:pPr>
             <a:r>
-              <a:rPr sz="2200" b="0">
-                <a:solidFill>
-                  <a:srgbClr val="78716C"/>
+              <a:rPr sz="1400" b="0">
+                <a:solidFill>
+                  <a:srgbClr val="7A6652"/>
                 </a:solidFill>
                 <a:latin typeface="Hiragino Sans"/>
               </a:rPr>
-              <a:t>研究レポートが</a:t>
-            </a:r>
-          </a:p>
-          <a:p>
-            <a:pPr algn="l">
-              <a:lnSpc>
-                <a:spcPct val="130000"/>
-              </a:lnSpc>
-            </a:pPr>
-            <a:r>
-              <a:rPr sz="2200" b="0">
-                <a:solidFill>
-                  <a:srgbClr val="78716C"/>
-                </a:solidFill>
-                <a:latin typeface="Hiragino Sans"/>
-              </a:rPr>
-              <a:t>公開した数字</a:t>
+              <a:t>研究レポートの数字</a:t>
             </a:r>
           </a:p>
         </p:txBody>
@@ -3624,8 +3608,8 @@
         </p:nvSpPr>
         <p:spPr>
           <a:xfrm>
-            <a:off x="320040" y="1600200"/>
-            <a:ext cx="3474720" cy="82296"/>
+            <a:off x="365760" y="1371600"/>
+            <a:ext cx="3383280" cy="84856"/>
           </a:xfrm>
           <a:prstGeom prst="rect">
             <a:avLst/>
@@ -3650,14 +3634,14 @@
           </a:fontRef>
         </p:style>
         <p:txBody>
-          <a:bodyPr rtlCol="0" anchor="ctr" wrap="none"/>
+          <a:bodyPr rtlCol="0" anchor="ctr"/>
           <a:lstStyle/>
           <a:p>
             <a:pPr algn="l"/>
             <a:r>
-              <a:rPr sz="6000" b="1">
-                <a:solidFill>
-                  <a:srgbClr val="C9A02D"/>
+              <a:rPr sz="5800" b="1">
+                <a:solidFill>
+                  <a:srgbClr val="B8942F"/>
                 </a:solidFill>
                 <a:latin typeface="Hiragino Sans"/>
               </a:rPr>
@@ -3666,7 +3650,7 @@
             <a:r>
               <a:rPr sz="2400" b="1">
                 <a:solidFill>
-                  <a:srgbClr val="C9A02D"/>
+                  <a:srgbClr val="B8942F"/>
                 </a:solidFill>
                 <a:latin typeface="Hiragino Sans"/>
               </a:rPr>
@@ -3683,8 +3667,8 @@
         </p:nvSpPr>
         <p:spPr>
           <a:xfrm>
-            <a:off x="320040" y="2743200"/>
-            <a:ext cx="3474720" cy="66568"/>
+            <a:off x="365760" y="2514600"/>
+            <a:ext cx="3383280" cy="71323"/>
           </a:xfrm>
           <a:prstGeom prst="rect">
             <a:avLst/>
@@ -3720,7 +3704,7 @@
             <a:r>
               <a:rPr sz="2000" b="1">
                 <a:solidFill>
-                  <a:srgbClr val="F5F0EB"/>
+                  <a:srgbClr val="1C1917"/>
                 </a:solidFill>
                 <a:latin typeface="Hiragino Sans"/>
               </a:rPr>
@@ -3736,7 +3720,7 @@
             <a:r>
               <a:rPr sz="2000" b="1">
                 <a:solidFill>
-                  <a:srgbClr val="F5F0EB"/>
+                  <a:srgbClr val="1C1917"/>
                 </a:solidFill>
                 <a:latin typeface="Hiragino Sans"/>
               </a:rPr>
@@ -3753,51 +3737,8 @@
         </p:nvSpPr>
         <p:spPr>
           <a:xfrm>
-            <a:off x="320040" y="3657600"/>
-            <a:ext cx="914400" cy="13716"/>
-          </a:xfrm>
-          <a:prstGeom prst="rect">
-            <a:avLst/>
-          </a:prstGeom>
-          <a:solidFill>
-            <a:srgbClr val="C9A02D"/>
-          </a:solidFill>
-          <a:ln>
-            <a:noFill/>
-          </a:ln>
-        </p:spPr>
-        <p:style>
-          <a:lnRef idx="1">
-            <a:schemeClr val="accent1"/>
-          </a:lnRef>
-          <a:fillRef idx="3">
-            <a:schemeClr val="accent1"/>
-          </a:fillRef>
-          <a:effectRef idx="2">
-            <a:schemeClr val="accent1"/>
-          </a:effectRef>
-          <a:fontRef idx="minor">
-            <a:schemeClr val="lt1"/>
-          </a:fontRef>
-        </p:style>
-        <p:txBody>
-          <a:bodyPr rtlCol="0" anchor="ctr"/>
-          <a:lstStyle/>
-          <a:p>
-            <a:pPr algn="ctr"/>
-          </a:p>
-        </p:txBody>
-      </p:sp>
-      <p:sp>
-        <p:nvSpPr>
-          <p:cNvPr id="7" name="Rectangle 6"/>
-          <p:cNvSpPr/>
-          <p:nvPr/>
-        </p:nvSpPr>
-        <p:spPr>
-          <a:xfrm>
-            <a:off x="320040" y="3886200"/>
-            <a:ext cx="3474720" cy="21634"/>
+            <a:off x="365760" y="3429000"/>
+            <a:ext cx="3383280" cy="46360"/>
           </a:xfrm>
           <a:prstGeom prst="rect">
             <a:avLst/>
@@ -3833,25 +3774,41 @@
             <a:r>
               <a:rPr sz="1300" b="0">
                 <a:solidFill>
-                  <a:srgbClr val="78716C"/>
+                  <a:srgbClr val="7A6652"/>
                 </a:solidFill>
                 <a:latin typeface="Hiragino Sans"/>
               </a:rPr>
-              <a:t>回答は9つのビジョンに分類された</a:t>
-            </a:r>
-          </a:p>
-        </p:txBody>
-      </p:sp>
-      <p:sp>
-        <p:nvSpPr>
-          <p:cNvPr id="8" name="Rectangle 7"/>
+              <a:t>この問いへの回答が</a:t>
+            </a:r>
+          </a:p>
+          <a:p>
+            <a:pPr algn="l">
+              <a:lnSpc>
+                <a:spcPct val="130000"/>
+              </a:lnSpc>
+            </a:pPr>
+            <a:r>
+              <a:rPr sz="1300" b="0">
+                <a:solidFill>
+                  <a:srgbClr val="7A6652"/>
+                </a:solidFill>
+                <a:latin typeface="Hiragino Sans"/>
+              </a:rPr>
+              <a:t>9つのビジョンに分類された</a:t>
+            </a:r>
+          </a:p>
+        </p:txBody>
+      </p:sp>
+      <p:sp>
+        <p:nvSpPr>
+          <p:cNvPr id="7" name="Rectangle 6"/>
           <p:cNvSpPr/>
           <p:nvPr/>
         </p:nvSpPr>
         <p:spPr>
           <a:xfrm>
-            <a:off x="320040" y="6400000"/>
-            <a:ext cx="3474720" cy="13313"/>
+            <a:off x="365760" y="6400000"/>
+            <a:ext cx="3383280" cy="12481"/>
           </a:xfrm>
           <a:prstGeom prst="rect">
             <a:avLst/>
@@ -3885,27 +3842,27 @@
               </a:lnSpc>
             </a:pPr>
             <a:r>
-              <a:rPr sz="800" b="0">
-                <a:solidFill>
-                  <a:srgbClr val="4A4540"/>
+              <a:rPr sz="700" b="0">
+                <a:solidFill>
+                  <a:srgbClr val="BFAD9C"/>
                 </a:solidFill>
                 <a:latin typeface="Hiragino Sans"/>
               </a:rPr>
-              <a:t>出典: Anthropic "What 81,000 people want from AI"</a:t>
-            </a:r>
-          </a:p>
-        </p:txBody>
-      </p:sp>
-      <p:sp>
-        <p:nvSpPr>
-          <p:cNvPr id="9" name="Rectangle 8"/>
+              <a:t>出典: Anthropic "What 81,000 people want from AI" 2026.3.18</a:t>
+            </a:r>
+          </a:p>
+        </p:txBody>
+      </p:sp>
+      <p:sp>
+        <p:nvSpPr>
+          <p:cNvPr id="8" name="Rectangle 7"/>
           <p:cNvSpPr/>
           <p:nvPr/>
         </p:nvSpPr>
         <p:spPr>
           <a:xfrm>
-            <a:off x="320040" y="6720000"/>
-            <a:ext cx="3474720" cy="14977"/>
+            <a:off x="365760" y="6720000"/>
+            <a:ext cx="3383280" cy="16047"/>
           </a:xfrm>
           <a:prstGeom prst="rect">
             <a:avLst/>
@@ -3941,7 +3898,7 @@
             <a:r>
               <a:rPr sz="900" b="0">
                 <a:solidFill>
-                  <a:srgbClr val="C9A02D"/>
+                  <a:srgbClr val="B8942F"/>
                 </a:solidFill>
                 <a:latin typeface="Hiragino Sans"/>
               </a:rPr>
@@ -3964,7 +3921,7 @@
     <p:bg>
       <p:bgPr>
         <a:solidFill>
-          <a:srgbClr val="12100E"/>
+          <a:srgbClr val="FAF8F5"/>
         </a:solidFill>
         <a:effectLst/>
       </p:bgPr>
@@ -3984,8 +3941,8 @@
         </p:nvSpPr>
         <p:spPr>
           <a:xfrm>
-            <a:off x="320040" y="548640"/>
-            <a:ext cx="3474720" cy="66568"/>
+            <a:off x="365760" y="548640"/>
+            <a:ext cx="3383280" cy="64190"/>
           </a:xfrm>
           <a:prstGeom prst="rect">
             <a:avLst/>
@@ -4019,9 +3976,9 @@
               </a:lnSpc>
             </a:pPr>
             <a:r>
-              <a:rPr sz="2000" b="0">
-                <a:solidFill>
-                  <a:srgbClr val="78716C"/>
+              <a:rPr sz="1800" b="0">
+                <a:solidFill>
+                  <a:srgbClr val="5D4E3F"/>
                 </a:solidFill>
                 <a:latin typeface="Hiragino Sans"/>
               </a:rPr>
@@ -4035,9 +3992,9 @@
               </a:lnSpc>
             </a:pPr>
             <a:r>
-              <a:rPr sz="2000" b="0">
-                <a:solidFill>
-                  <a:srgbClr val="78716C"/>
+              <a:rPr sz="1800" b="0">
+                <a:solidFill>
+                  <a:srgbClr val="5D4E3F"/>
                 </a:solidFill>
                 <a:latin typeface="Hiragino Sans"/>
               </a:rPr>
@@ -4054,14 +4011,14 @@
         </p:nvSpPr>
         <p:spPr>
           <a:xfrm>
-            <a:off x="320040" y="1143000"/>
+            <a:off x="365760" y="1143000"/>
             <a:ext cx="914400" cy="13716"/>
           </a:xfrm>
           <a:prstGeom prst="rect">
             <a:avLst/>
           </a:prstGeom>
           <a:solidFill>
-            <a:srgbClr val="C9A02D"/>
+            <a:srgbClr val="B8942F"/>
           </a:solidFill>
           <a:ln>
             <a:noFill/>
@@ -4097,8 +4054,8 @@
         </p:nvSpPr>
         <p:spPr>
           <a:xfrm>
-            <a:off x="320040" y="1371600"/>
-            <a:ext cx="3474720" cy="53254"/>
+            <a:off x="365760" y="1371600"/>
+            <a:ext cx="3383280" cy="57058"/>
           </a:xfrm>
           <a:prstGeom prst="rect">
             <a:avLst/>
@@ -4134,7 +4091,7 @@
             <a:r>
               <a:rPr sz="3200" b="1">
                 <a:solidFill>
-                  <a:srgbClr val="4DD0E1"/>
+                  <a:srgbClr val="1B3A5C"/>
                 </a:solidFill>
                 <a:latin typeface="Hiragino Sans"/>
               </a:rPr>
@@ -4151,8 +4108,8 @@
         </p:nvSpPr>
         <p:spPr>
           <a:xfrm>
-            <a:off x="320040" y="1791600"/>
-            <a:ext cx="3474720" cy="21634"/>
+            <a:off x="365760" y="1801600"/>
+            <a:ext cx="3383280" cy="21396"/>
           </a:xfrm>
           <a:prstGeom prst="rect">
             <a:avLst/>
@@ -4186,9 +4143,9 @@
               </a:lnSpc>
             </a:pPr>
             <a:r>
-              <a:rPr sz="1300" b="0">
-                <a:solidFill>
-                  <a:srgbClr val="78716C"/>
+              <a:rPr sz="1200" b="0">
+                <a:solidFill>
+                  <a:srgbClr val="7A6652"/>
                 </a:solidFill>
                 <a:latin typeface="Hiragino Sans"/>
               </a:rPr>
@@ -4205,8 +4162,8 @@
         </p:nvSpPr>
         <p:spPr>
           <a:xfrm>
-            <a:off x="320040" y="2286000"/>
-            <a:ext cx="3474720" cy="53254"/>
+            <a:off x="365760" y="2286000"/>
+            <a:ext cx="3383280" cy="57058"/>
           </a:xfrm>
           <a:prstGeom prst="rect">
             <a:avLst/>
@@ -4242,7 +4199,7 @@
             <a:r>
               <a:rPr sz="3200" b="1">
                 <a:solidFill>
-                  <a:srgbClr val="FFB300"/>
+                  <a:srgbClr val="C17817"/>
                 </a:solidFill>
                 <a:latin typeface="Hiragino Sans"/>
               </a:rPr>
@@ -4259,8 +4216,8 @@
         </p:nvSpPr>
         <p:spPr>
           <a:xfrm>
-            <a:off x="320040" y="2706000"/>
-            <a:ext cx="3474720" cy="21634"/>
+            <a:off x="365760" y="2716000"/>
+            <a:ext cx="3383280" cy="21396"/>
           </a:xfrm>
           <a:prstGeom prst="rect">
             <a:avLst/>
@@ -4294,9 +4251,9 @@
               </a:lnSpc>
             </a:pPr>
             <a:r>
-              <a:rPr sz="1300" b="0">
-                <a:solidFill>
-                  <a:srgbClr val="78716C"/>
+              <a:rPr sz="1200" b="0">
+                <a:solidFill>
+                  <a:srgbClr val="7A6652"/>
                 </a:solidFill>
                 <a:latin typeface="Hiragino Sans"/>
               </a:rPr>
@@ -4313,8 +4270,8 @@
         </p:nvSpPr>
         <p:spPr>
           <a:xfrm>
-            <a:off x="320040" y="3200400"/>
-            <a:ext cx="3474720" cy="53254"/>
+            <a:off x="365760" y="3200400"/>
+            <a:ext cx="3383280" cy="57058"/>
           </a:xfrm>
           <a:prstGeom prst="rect">
             <a:avLst/>
@@ -4350,7 +4307,7 @@
             <a:r>
               <a:rPr sz="3200" b="1">
                 <a:solidFill>
-                  <a:srgbClr val="6BD47B"/>
+                  <a:srgbClr val="2A7A6E"/>
                 </a:solidFill>
                 <a:latin typeface="Hiragino Sans"/>
               </a:rPr>
@@ -4367,8 +4324,8 @@
         </p:nvSpPr>
         <p:spPr>
           <a:xfrm>
-            <a:off x="320040" y="3620400"/>
-            <a:ext cx="3474720" cy="21634"/>
+            <a:off x="365760" y="3630400"/>
+            <a:ext cx="3383280" cy="21396"/>
           </a:xfrm>
           <a:prstGeom prst="rect">
             <a:avLst/>
@@ -4402,9 +4359,9 @@
               </a:lnSpc>
             </a:pPr>
             <a:r>
-              <a:rPr sz="1300" b="0">
-                <a:solidFill>
-                  <a:srgbClr val="78716C"/>
+              <a:rPr sz="1200" b="0">
+                <a:solidFill>
+                  <a:srgbClr val="7A6652"/>
                 </a:solidFill>
                 <a:latin typeface="Hiragino Sans"/>
               </a:rPr>
@@ -4421,8 +4378,8 @@
         </p:nvSpPr>
         <p:spPr>
           <a:xfrm>
-            <a:off x="320040" y="4114800"/>
-            <a:ext cx="3474720" cy="53254"/>
+            <a:off x="365760" y="4114800"/>
+            <a:ext cx="3383280" cy="57058"/>
           </a:xfrm>
           <a:prstGeom prst="rect">
             <a:avLst/>
@@ -4458,7 +4415,7 @@
             <a:r>
               <a:rPr sz="3200" b="1">
                 <a:solidFill>
-                  <a:srgbClr val="BB86FC"/>
+                  <a:srgbClr val="B8942F"/>
                 </a:solidFill>
                 <a:latin typeface="Hiragino Sans"/>
               </a:rPr>
@@ -4475,8 +4432,8 @@
         </p:nvSpPr>
         <p:spPr>
           <a:xfrm>
-            <a:off x="320040" y="4534800"/>
-            <a:ext cx="3474720" cy="21634"/>
+            <a:off x="365760" y="4544800"/>
+            <a:ext cx="3383280" cy="21396"/>
           </a:xfrm>
           <a:prstGeom prst="rect">
             <a:avLst/>
@@ -4510,9 +4467,9 @@
               </a:lnSpc>
             </a:pPr>
             <a:r>
-              <a:rPr sz="1300" b="0">
-                <a:solidFill>
-                  <a:srgbClr val="78716C"/>
+              <a:rPr sz="1200" b="0">
+                <a:solidFill>
+                  <a:srgbClr val="7A6652"/>
                 </a:solidFill>
                 <a:latin typeface="Hiragino Sans"/>
               </a:rPr>
@@ -4529,8 +4486,8 @@
         </p:nvSpPr>
         <p:spPr>
           <a:xfrm>
-            <a:off x="320040" y="5257800"/>
-            <a:ext cx="3474720" cy="46597"/>
+            <a:off x="365760" y="5257800"/>
+            <a:ext cx="3383280" cy="49926"/>
           </a:xfrm>
           <a:prstGeom prst="rect">
             <a:avLst/>
@@ -4566,7 +4523,7 @@
             <a:r>
               <a:rPr sz="1400" b="1">
                 <a:solidFill>
-                  <a:srgbClr val="C9A02D"/>
+                  <a:srgbClr val="B8942F"/>
                 </a:solidFill>
                 <a:latin typeface="Hiragino Sans"/>
               </a:rPr>
@@ -4582,7 +4539,7 @@
             <a:r>
               <a:rPr sz="1400" b="1">
                 <a:solidFill>
-                  <a:srgbClr val="C9A02D"/>
+                  <a:srgbClr val="B8942F"/>
                 </a:solidFill>
                 <a:latin typeface="Hiragino Sans"/>
               </a:rPr>
@@ -4599,8 +4556,8 @@
         </p:nvSpPr>
         <p:spPr>
           <a:xfrm>
-            <a:off x="320040" y="6720000"/>
-            <a:ext cx="3474720" cy="14977"/>
+            <a:off x="365760" y="6720000"/>
+            <a:ext cx="3383280" cy="16047"/>
           </a:xfrm>
           <a:prstGeom prst="rect">
             <a:avLst/>
@@ -4636,7 +4593,7 @@
             <a:r>
               <a:rPr sz="900" b="0">
                 <a:solidFill>
-                  <a:srgbClr val="C9A02D"/>
+                  <a:srgbClr val="B8942F"/>
                 </a:solidFill>
                 <a:latin typeface="Hiragino Sans"/>
               </a:rPr>
@@ -4659,7 +4616,7 @@
     <p:bg>
       <p:bgPr>
         <a:solidFill>
-          <a:srgbClr val="12100E"/>
+          <a:srgbClr val="FAF8F5"/>
         </a:solidFill>
         <a:effectLst/>
       </p:bgPr>
@@ -4679,14 +4636,14 @@
         </p:nvSpPr>
         <p:spPr>
           <a:xfrm>
-            <a:off x="0" y="1143000"/>
-            <a:ext cx="36576" cy="2743200"/>
+            <a:off x="0" y="914400"/>
+            <a:ext cx="32000" cy="3657600"/>
           </a:xfrm>
           <a:prstGeom prst="rect">
             <a:avLst/>
           </a:prstGeom>
           <a:solidFill>
-            <a:srgbClr val="C9A02D"/>
+            <a:srgbClr val="B8942F"/>
           </a:solidFill>
           <a:ln>
             <a:noFill/>
@@ -4722,8 +4679,8 @@
         </p:nvSpPr>
         <p:spPr>
           <a:xfrm>
-            <a:off x="320040" y="1143000"/>
-            <a:ext cx="3474720" cy="46597"/>
+            <a:off x="365760" y="914400"/>
+            <a:ext cx="3383280" cy="46360"/>
           </a:xfrm>
           <a:prstGeom prst="rect">
             <a:avLst/>
@@ -4757,9 +4714,9 @@
               </a:lnSpc>
             </a:pPr>
             <a:r>
-              <a:rPr sz="1400" b="0">
-                <a:solidFill>
-                  <a:srgbClr val="78716C"/>
+              <a:rPr sz="1300" b="0">
+                <a:solidFill>
+                  <a:srgbClr val="7A6652"/>
                 </a:solidFill>
                 <a:latin typeface="Hiragino Sans"/>
               </a:rPr>
@@ -4773,13 +4730,13 @@
               </a:lnSpc>
             </a:pPr>
             <a:r>
-              <a:rPr sz="1400" b="0">
-                <a:solidFill>
-                  <a:srgbClr val="78716C"/>
+              <a:rPr sz="1300" b="0">
+                <a:solidFill>
+                  <a:srgbClr val="7A6652"/>
                 </a:solidFill>
                 <a:latin typeface="Hiragino Sans"/>
               </a:rPr>
-              <a:t>メキシコのエンジニア</a:t>
+              <a:t>メキシコのエンジニアの声</a:t>
             </a:r>
           </a:p>
         </p:txBody>
@@ -4792,8 +4749,8 @@
         </p:nvSpPr>
         <p:spPr>
           <a:xfrm>
-            <a:off x="320040" y="1828800"/>
-            <a:ext cx="3474720" cy="79881"/>
+            <a:off x="365760" y="1600200"/>
+            <a:ext cx="3383280" cy="78455"/>
           </a:xfrm>
           <a:prstGeom prst="rect">
             <a:avLst/>
@@ -4827,9 +4784,9 @@
               </a:lnSpc>
             </a:pPr>
             <a:r>
-              <a:rPr sz="2400" b="1">
-                <a:solidFill>
-                  <a:srgbClr val="F5F0EB"/>
+              <a:rPr sz="2200" b="1">
+                <a:solidFill>
+                  <a:srgbClr val="1C1917"/>
                 </a:solidFill>
                 <a:latin typeface="Hiragino Sans"/>
               </a:rPr>
@@ -4843,9 +4800,9 @@
               </a:lnSpc>
             </a:pPr>
             <a:r>
-              <a:rPr sz="2400" b="1">
-                <a:solidFill>
-                  <a:srgbClr val="F5F0EB"/>
+              <a:rPr sz="2200" b="1">
+                <a:solidFill>
+                  <a:srgbClr val="1C1917"/>
                 </a:solidFill>
                 <a:latin typeface="Hiragino Sans"/>
               </a:rPr>
@@ -4862,8 +4819,8 @@
         </p:nvSpPr>
         <p:spPr>
           <a:xfrm>
-            <a:off x="320040" y="2743200"/>
-            <a:ext cx="3474720" cy="119822"/>
+            <a:off x="365760" y="2514600"/>
+            <a:ext cx="3383280" cy="117683"/>
           </a:xfrm>
           <a:prstGeom prst="rect">
             <a:avLst/>
@@ -4897,9 +4854,9 @@
               </a:lnSpc>
             </a:pPr>
             <a:r>
-              <a:rPr sz="2400" b="1">
-                <a:solidFill>
-                  <a:srgbClr val="C9A02D"/>
+              <a:rPr sz="2200" b="1">
+                <a:solidFill>
+                  <a:srgbClr val="B8942F"/>
                 </a:solidFill>
                 <a:latin typeface="Hiragino Sans"/>
               </a:rPr>
@@ -4913,9 +4870,9 @@
               </a:lnSpc>
             </a:pPr>
             <a:r>
-              <a:rPr sz="2400" b="1">
-                <a:solidFill>
-                  <a:srgbClr val="C9A02D"/>
+              <a:rPr sz="2200" b="1">
+                <a:solidFill>
+                  <a:srgbClr val="B8942F"/>
                 </a:solidFill>
                 <a:latin typeface="Hiragino Sans"/>
               </a:rPr>
@@ -4929,9 +4886,9 @@
               </a:lnSpc>
             </a:pPr>
             <a:r>
-              <a:rPr sz="2400" b="1">
-                <a:solidFill>
-                  <a:srgbClr val="C9A02D"/>
+              <a:rPr sz="2200" b="1">
+                <a:solidFill>
+                  <a:srgbClr val="B8942F"/>
                 </a:solidFill>
                 <a:latin typeface="Hiragino Sans"/>
               </a:rPr>
@@ -4948,14 +4905,14 @@
         </p:nvSpPr>
         <p:spPr>
           <a:xfrm>
-            <a:off x="320040" y="4343400"/>
+            <a:off x="365760" y="4343400"/>
             <a:ext cx="914400" cy="13716"/>
           </a:xfrm>
           <a:prstGeom prst="rect">
             <a:avLst/>
           </a:prstGeom>
           <a:solidFill>
-            <a:srgbClr val="C9A02D"/>
+            <a:srgbClr val="B8942F"/>
           </a:solidFill>
           <a:ln>
             <a:noFill/>
@@ -4991,8 +4948,8 @@
         </p:nvSpPr>
         <p:spPr>
           <a:xfrm>
-            <a:off x="320040" y="4571040"/>
-            <a:ext cx="3474720" cy="64904"/>
+            <a:off x="365760" y="4571040"/>
+            <a:ext cx="3383280" cy="74066"/>
           </a:xfrm>
           <a:prstGeom prst="rect">
             <a:avLst/>
@@ -5022,13 +4979,13 @@
           <a:p>
             <a:pPr algn="l">
               <a:lnSpc>
-                <a:spcPct val="130000"/>
+                <a:spcPct val="150000"/>
               </a:lnSpc>
             </a:pPr>
             <a:r>
-              <a:rPr sz="1300" b="0">
-                <a:solidFill>
-                  <a:srgbClr val="78716C"/>
+              <a:rPr sz="1200" b="0">
+                <a:solidFill>
+                  <a:srgbClr val="7A6652"/>
                 </a:solidFill>
                 <a:latin typeface="Hiragino Sans"/>
               </a:rPr>
@@ -5038,13 +4995,13 @@
           <a:p>
             <a:pPr algn="l">
               <a:lnSpc>
-                <a:spcPct val="130000"/>
+                <a:spcPct val="150000"/>
               </a:lnSpc>
             </a:pPr>
             <a:r>
-              <a:rPr sz="1300" b="0">
-                <a:solidFill>
-                  <a:srgbClr val="78716C"/>
+              <a:rPr sz="1200" b="0">
+                <a:solidFill>
+                  <a:srgbClr val="7A6652"/>
                 </a:solidFill>
                 <a:latin typeface="Hiragino Sans"/>
               </a:rPr>
@@ -5054,13 +5011,13 @@
           <a:p>
             <a:pPr algn="l">
               <a:lnSpc>
-                <a:spcPct val="130000"/>
+                <a:spcPct val="150000"/>
               </a:lnSpc>
             </a:pPr>
             <a:r>
-              <a:rPr sz="1300" b="0">
-                <a:solidFill>
-                  <a:srgbClr val="78716C"/>
+              <a:rPr sz="1200" b="0">
+                <a:solidFill>
+                  <a:srgbClr val="7A6652"/>
                 </a:solidFill>
                 <a:latin typeface="Hiragino Sans"/>
               </a:rPr>
@@ -5077,8 +5034,8 @@
         </p:nvSpPr>
         <p:spPr>
           <a:xfrm>
-            <a:off x="320040" y="6720000"/>
-            <a:ext cx="3474720" cy="14977"/>
+            <a:off x="365760" y="6720000"/>
+            <a:ext cx="3383280" cy="16047"/>
           </a:xfrm>
           <a:prstGeom prst="rect">
             <a:avLst/>
@@ -5114,7 +5071,7 @@
             <a:r>
               <a:rPr sz="900" b="0">
                 <a:solidFill>
-                  <a:srgbClr val="C9A02D"/>
+                  <a:srgbClr val="B8942F"/>
                 </a:solidFill>
                 <a:latin typeface="Hiragino Sans"/>
               </a:rPr>
@@ -5137,7 +5094,7 @@
     <p:bg>
       <p:bgPr>
         <a:solidFill>
-          <a:srgbClr val="12100E"/>
+          <a:srgbClr val="FAF8F5"/>
         </a:solidFill>
         <a:effectLst/>
       </p:bgPr>
@@ -5157,8 +5114,8 @@
         </p:nvSpPr>
         <p:spPr>
           <a:xfrm>
-            <a:off x="320040" y="1828800"/>
-            <a:ext cx="3474720" cy="106509"/>
+            <a:off x="365760" y="1828800"/>
+            <a:ext cx="3383280" cy="114117"/>
           </a:xfrm>
           <a:prstGeom prst="rect">
             <a:avLst/>
@@ -5194,7 +5151,7 @@
             <a:r>
               <a:rPr sz="3200" b="1">
                 <a:solidFill>
-                  <a:srgbClr val="F5F0EB"/>
+                  <a:srgbClr val="1C1917"/>
                 </a:solidFill>
                 <a:latin typeface="Hiragino Sans"/>
               </a:rPr>
@@ -5210,7 +5167,7 @@
             <a:r>
               <a:rPr sz="3200" b="1">
                 <a:solidFill>
-                  <a:srgbClr val="F5F0EB"/>
+                  <a:srgbClr val="1C1917"/>
                 </a:solidFill>
                 <a:latin typeface="Hiragino Sans"/>
               </a:rPr>
@@ -5227,8 +5184,8 @@
         </p:nvSpPr>
         <p:spPr>
           <a:xfrm>
-            <a:off x="320040" y="3200400"/>
-            <a:ext cx="3474720" cy="159763"/>
+            <a:off x="365760" y="3200400"/>
+            <a:ext cx="3383280" cy="171175"/>
           </a:xfrm>
           <a:prstGeom prst="rect">
             <a:avLst/>
@@ -5264,7 +5221,7 @@
             <a:r>
               <a:rPr sz="3200" b="1">
                 <a:solidFill>
-                  <a:srgbClr val="C9A02D"/>
+                  <a:srgbClr val="B8942F"/>
                 </a:solidFill>
                 <a:latin typeface="Hiragino Sans"/>
               </a:rPr>
@@ -5280,7 +5237,7 @@
             <a:r>
               <a:rPr sz="3200" b="1">
                 <a:solidFill>
-                  <a:srgbClr val="C9A02D"/>
+                  <a:srgbClr val="B8942F"/>
                 </a:solidFill>
                 <a:latin typeface="Hiragino Sans"/>
               </a:rPr>
@@ -5296,7 +5253,7 @@
             <a:r>
               <a:rPr sz="3200" b="1">
                 <a:solidFill>
-                  <a:srgbClr val="C9A02D"/>
+                  <a:srgbClr val="B8942F"/>
                 </a:solidFill>
                 <a:latin typeface="Hiragino Sans"/>
               </a:rPr>
@@ -5313,8 +5270,8 @@
         </p:nvSpPr>
         <p:spPr>
           <a:xfrm>
-            <a:off x="320040" y="6172200"/>
-            <a:ext cx="3474720" cy="13313"/>
+            <a:off x="365760" y="6400000"/>
+            <a:ext cx="3383280" cy="12481"/>
           </a:xfrm>
           <a:prstGeom prst="rect">
             <a:avLst/>
@@ -5348,9 +5305,9 @@
               </a:lnSpc>
             </a:pPr>
             <a:r>
-              <a:rPr sz="800" b="0">
-                <a:solidFill>
-                  <a:srgbClr val="4A4540"/>
+              <a:rPr sz="700" b="0">
+                <a:solidFill>
+                  <a:srgbClr val="BFAD9C"/>
                 </a:solidFill>
                 <a:latin typeface="Hiragino Sans"/>
               </a:rPr>
@@ -5367,8 +5324,8 @@
         </p:nvSpPr>
         <p:spPr>
           <a:xfrm>
-            <a:off x="320040" y="6720000"/>
-            <a:ext cx="3474720" cy="14977"/>
+            <a:off x="365760" y="6720000"/>
+            <a:ext cx="3383280" cy="16047"/>
           </a:xfrm>
           <a:prstGeom prst="rect">
             <a:avLst/>
@@ -5404,7 +5361,7 @@
             <a:r>
               <a:rPr sz="900" b="0">
                 <a:solidFill>
-                  <a:srgbClr val="C9A02D"/>
+                  <a:srgbClr val="B8942F"/>
                 </a:solidFill>
                 <a:latin typeface="Hiragino Sans"/>
               </a:rPr>
